--- a/Fraud_Detection/fraud detection.pptx
+++ b/Fraud_Detection/fraud detection.pptx
@@ -5,10 +5,10 @@
     <p:sldMasterId id="2147483648" r:id="rId4"/>
   </p:sldMasterIdLst>
   <p:notesMasterIdLst>
-    <p:notesMasterId r:id="rId44"/>
+    <p:notesMasterId r:id="rId47"/>
   </p:notesMasterIdLst>
   <p:handoutMasterIdLst>
-    <p:handoutMasterId r:id="rId45"/>
+    <p:handoutMasterId r:id="rId48"/>
   </p:handoutMasterIdLst>
   <p:sldIdLst>
     <p:sldId id="264" r:id="rId5"/>
@@ -25,31 +25,34 @@
     <p:sldId id="489" r:id="rId16"/>
     <p:sldId id="491" r:id="rId17"/>
     <p:sldId id="492" r:id="rId18"/>
-    <p:sldId id="490" r:id="rId19"/>
-    <p:sldId id="483" r:id="rId20"/>
-    <p:sldId id="493" r:id="rId21"/>
-    <p:sldId id="496" r:id="rId22"/>
-    <p:sldId id="482" r:id="rId23"/>
-    <p:sldId id="497" r:id="rId24"/>
-    <p:sldId id="500" r:id="rId25"/>
-    <p:sldId id="499" r:id="rId26"/>
-    <p:sldId id="501" r:id="rId27"/>
-    <p:sldId id="502" r:id="rId28"/>
-    <p:sldId id="503" r:id="rId29"/>
-    <p:sldId id="504" r:id="rId30"/>
-    <p:sldId id="508" r:id="rId31"/>
-    <p:sldId id="505" r:id="rId32"/>
-    <p:sldId id="506" r:id="rId33"/>
-    <p:sldId id="498" r:id="rId34"/>
-    <p:sldId id="509" r:id="rId35"/>
-    <p:sldId id="510" r:id="rId36"/>
-    <p:sldId id="507" r:id="rId37"/>
-    <p:sldId id="511" r:id="rId38"/>
-    <p:sldId id="512" r:id="rId39"/>
+    <p:sldId id="518" r:id="rId19"/>
+    <p:sldId id="490" r:id="rId20"/>
+    <p:sldId id="483" r:id="rId21"/>
+    <p:sldId id="493" r:id="rId22"/>
+    <p:sldId id="496" r:id="rId23"/>
+    <p:sldId id="482" r:id="rId24"/>
+    <p:sldId id="497" r:id="rId25"/>
+    <p:sldId id="500" r:id="rId26"/>
+    <p:sldId id="499" r:id="rId27"/>
+    <p:sldId id="501" r:id="rId28"/>
+    <p:sldId id="502" r:id="rId29"/>
+    <p:sldId id="503" r:id="rId30"/>
+    <p:sldId id="504" r:id="rId31"/>
+    <p:sldId id="508" r:id="rId32"/>
+    <p:sldId id="505" r:id="rId33"/>
+    <p:sldId id="506" r:id="rId34"/>
+    <p:sldId id="498" r:id="rId35"/>
+    <p:sldId id="509" r:id="rId36"/>
+    <p:sldId id="510" r:id="rId37"/>
+    <p:sldId id="507" r:id="rId38"/>
+    <p:sldId id="511" r:id="rId39"/>
     <p:sldId id="513" r:id="rId40"/>
     <p:sldId id="515" r:id="rId41"/>
-    <p:sldId id="464" r:id="rId42"/>
-    <p:sldId id="434" r:id="rId43"/>
+    <p:sldId id="517" r:id="rId42"/>
+    <p:sldId id="516" r:id="rId43"/>
+    <p:sldId id="464" r:id="rId44"/>
+    <p:sldId id="434" r:id="rId45"/>
+    <p:sldId id="512" r:id="rId46"/>
   </p:sldIdLst>
   <p:sldSz cx="10799763" cy="6858000"/>
   <p:notesSz cx="6858000" cy="9144000"/>
@@ -2198,7 +2201,7 @@
               <a:pPr>
                 <a:defRPr/>
               </a:pPr>
-              <a:t>19</a:t>
+              <a:t>20</a:t>
             </a:fld>
             <a:endParaRPr lang="en-US"/>
           </a:p>
@@ -2311,7 +2314,7 @@
               <a:pPr>
                 <a:defRPr/>
               </a:pPr>
-              <a:t>30</a:t>
+              <a:t>31</a:t>
             </a:fld>
             <a:endParaRPr lang="en-US"/>
           </a:p>
@@ -2448,7 +2451,7 @@
               <a:pPr>
                 <a:defRPr/>
               </a:pPr>
-              <a:t>31</a:t>
+              <a:t>32</a:t>
             </a:fld>
             <a:endParaRPr lang="en-US"/>
           </a:p>
@@ -2562,7 +2565,7 @@
               <a:pPr>
                 <a:defRPr/>
               </a:pPr>
-              <a:t>32</a:t>
+              <a:t>33</a:t>
             </a:fld>
             <a:endParaRPr lang="en-US"/>
           </a:p>
@@ -2659,7 +2662,7 @@
               <a:pPr>
                 <a:defRPr/>
               </a:pPr>
-              <a:t>38</a:t>
+              <a:t>40</a:t>
             </a:fld>
             <a:endParaRPr lang="en-US"/>
           </a:p>
@@ -3096,7 +3099,7 @@
                 <a:latin typeface="Sabon LT Std" panose="02020602060506020403" pitchFamily="18" charset="0"/>
               </a:rPr>
               <a:pPr/>
-              <a:t>16-11-2025</a:t>
+              <a:t>17-11-2025</a:t>
             </a:fld>
             <a:endParaRPr lang="en-IN" sz="1400" b="1" dirty="0">
               <a:latin typeface="Sabon LT Std" panose="02020602060506020403" pitchFamily="18" charset="0"/>
@@ -3489,7 +3492,7 @@
                 <a:latin typeface="Sabon LT Std" panose="02020602060506020403" pitchFamily="18" charset="0"/>
               </a:rPr>
               <a:pPr/>
-              <a:t>16-11-2025</a:t>
+              <a:t>17-11-2025</a:t>
             </a:fld>
             <a:endParaRPr lang="en-IN" sz="1400" b="1" dirty="0">
               <a:latin typeface="Sabon LT Std" panose="02020602060506020403" pitchFamily="18" charset="0"/>
@@ -4735,7 +4738,7 @@
                 <a:latin typeface="Sabon LT Std" panose="02020602060506020403" pitchFamily="18" charset="0"/>
               </a:rPr>
               <a:pPr/>
-              <a:t>16-11-2025</a:t>
+              <a:t>17-11-2025</a:t>
             </a:fld>
             <a:endParaRPr lang="en-IN" sz="1400" b="1" dirty="0">
               <a:latin typeface="Sabon LT Std" panose="02020602060506020403" pitchFamily="18" charset="0"/>
@@ -5228,7 +5231,7 @@
                 <a:latin typeface="Sabon LT Std" panose="02020602060506020403" pitchFamily="18" charset="0"/>
               </a:rPr>
               <a:pPr/>
-              <a:t>16-11-2025</a:t>
+              <a:t>17-11-2025</a:t>
             </a:fld>
             <a:endParaRPr lang="en-IN" sz="1400" b="1" dirty="0">
               <a:latin typeface="Sabon LT Std" panose="02020602060506020403" pitchFamily="18" charset="0"/>
@@ -5699,7 +5702,7 @@
                 <a:latin typeface="Sabon LT Std" panose="02020602060506020403" pitchFamily="18" charset="0"/>
               </a:rPr>
               <a:pPr/>
-              <a:t>16-11-2025</a:t>
+              <a:t>17-11-2025</a:t>
             </a:fld>
             <a:endParaRPr lang="en-IN" sz="1400" b="1" dirty="0">
               <a:latin typeface="Sabon LT Std" panose="02020602060506020403" pitchFamily="18" charset="0"/>
@@ -6011,7 +6014,7 @@
                 <a:latin typeface="Sabon LT Std" panose="02020602060506020403" pitchFamily="18" charset="0"/>
               </a:rPr>
               <a:pPr/>
-              <a:t>16-11-2025</a:t>
+              <a:t>17-11-2025</a:t>
             </a:fld>
             <a:endParaRPr lang="en-IN" sz="1400" b="1" dirty="0">
               <a:latin typeface="Sabon LT Std" panose="02020602060506020403" pitchFamily="18" charset="0"/>
@@ -7789,9 +7792,17 @@
             </a:r>
           </a:p>
           <a:p>
+            <a:pPr marL="285750" indent="-285750">
+              <a:buFont typeface="Arial" panose="020B0604020202020204" pitchFamily="34" charset="0"/>
+              <a:buChar char="•"/>
+            </a:pPr>
             <a:endParaRPr lang="en-US" dirty="0"/>
           </a:p>
           <a:p>
+            <a:pPr marL="285750" indent="-285750">
+              <a:buFont typeface="Arial" panose="020B0604020202020204" pitchFamily="34" charset="0"/>
+              <a:buChar char="•"/>
+            </a:pPr>
             <a:r>
               <a:rPr lang="en-US" dirty="0"/>
               <a:t>Rows : </a:t>
@@ -7802,6 +7813,10 @@
             </a:r>
           </a:p>
           <a:p>
+            <a:pPr marL="285750" indent="-285750">
+              <a:buFont typeface="Arial" panose="020B0604020202020204" pitchFamily="34" charset="0"/>
+              <a:buChar char="•"/>
+            </a:pPr>
             <a:r>
               <a:rPr lang="en-US" dirty="0"/>
               <a:t>Columns : </a:t>
@@ -7824,6 +7839,10 @@
             <a:endParaRPr lang="en-US" dirty="0"/>
           </a:p>
           <a:p>
+            <a:pPr marL="285750" indent="-285750">
+              <a:buFont typeface="Arial" panose="020B0604020202020204" pitchFamily="34" charset="0"/>
+              <a:buChar char="•"/>
+            </a:pPr>
             <a:r>
               <a:rPr lang="en-US" dirty="0"/>
               <a:t>User Account: </a:t>
@@ -7846,9 +7865,17 @@
             </a:r>
           </a:p>
           <a:p>
+            <a:pPr marL="285750" indent="-285750">
+              <a:buFont typeface="Arial" panose="020B0604020202020204" pitchFamily="34" charset="0"/>
+              <a:buChar char="•"/>
+            </a:pPr>
             <a:endParaRPr lang="en-US" dirty="0"/>
           </a:p>
           <a:p>
+            <a:pPr marL="285750" indent="-285750">
+              <a:buFont typeface="Arial" panose="020B0604020202020204" pitchFamily="34" charset="0"/>
+              <a:buChar char="•"/>
+            </a:pPr>
             <a:r>
               <a:rPr lang="en-US" dirty="0"/>
               <a:t>Temporal: </a:t>
@@ -7871,9 +7898,17 @@
             </a:r>
           </a:p>
           <a:p>
+            <a:pPr marL="285750" indent="-285750">
+              <a:buFont typeface="Arial" panose="020B0604020202020204" pitchFamily="34" charset="0"/>
+              <a:buChar char="•"/>
+            </a:pPr>
             <a:endParaRPr lang="en-US" dirty="0"/>
           </a:p>
           <a:p>
+            <a:pPr marL="285750" indent="-285750">
+              <a:buFont typeface="Arial" panose="020B0604020202020204" pitchFamily="34" charset="0"/>
+              <a:buChar char="•"/>
+            </a:pPr>
             <a:r>
               <a:rPr lang="en-US" dirty="0"/>
               <a:t>Transaction: </a:t>
@@ -7888,18 +7923,34 @@
             </a:r>
           </a:p>
           <a:p>
+            <a:pPr marL="285750" indent="-285750">
+              <a:buFont typeface="Arial" panose="020B0604020202020204" pitchFamily="34" charset="0"/>
+              <a:buChar char="•"/>
+            </a:pPr>
             <a:endParaRPr lang="en-US" dirty="0"/>
           </a:p>
           <a:p>
+            <a:pPr marL="285750" indent="-285750">
+              <a:buFont typeface="Arial" panose="020B0604020202020204" pitchFamily="34" charset="0"/>
+              <a:buChar char="•"/>
+            </a:pPr>
             <a:r>
               <a:rPr lang="en-US" dirty="0"/>
               <a:t>Demographics: sex, age </a:t>
             </a:r>
           </a:p>
           <a:p>
+            <a:pPr marL="285750" indent="-285750">
+              <a:buFont typeface="Arial" panose="020B0604020202020204" pitchFamily="34" charset="0"/>
+              <a:buChar char="•"/>
+            </a:pPr>
             <a:endParaRPr lang="en-US" dirty="0"/>
           </a:p>
           <a:p>
+            <a:pPr marL="285750" indent="-285750">
+              <a:buFont typeface="Arial" panose="020B0604020202020204" pitchFamily="34" charset="0"/>
+              <a:buChar char="•"/>
+            </a:pPr>
             <a:r>
               <a:rPr lang="en-US" dirty="0"/>
               <a:t>Network: </a:t>
@@ -7913,30 +7964,50 @@
               <a:t>, </a:t>
             </a:r>
             <a:r>
-              <a:rPr lang="en-US" dirty="0" err="1"/>
+              <a:rPr lang="en-US" b="1" dirty="0" err="1">
+                <a:solidFill>
+                  <a:srgbClr val="FF0000"/>
+                </a:solidFill>
+              </a:rPr>
               <a:t>lower_bound_ipaddress</a:t>
             </a:r>
             <a:r>
-              <a:rPr lang="en-US" dirty="0"/>
+              <a:rPr lang="en-US" b="1" dirty="0">
+                <a:solidFill>
+                  <a:srgbClr val="FF0000"/>
+                </a:solidFill>
+              </a:rPr>
               <a:t>, </a:t>
             </a:r>
             <a:r>
-              <a:rPr lang="en-US" dirty="0" err="1"/>
+              <a:rPr lang="en-US" b="1" dirty="0" err="1">
+                <a:solidFill>
+                  <a:srgbClr val="FF0000"/>
+                </a:solidFill>
+              </a:rPr>
               <a:t>upperbound_ipaddress</a:t>
             </a:r>
             <a:r>
-              <a:rPr lang="en-US" dirty="0"/>
-              <a:t>, </a:t>
-            </a:r>
-            <a:r>
-              <a:rPr lang="en-US" b="1" dirty="0"/>
-              <a:t>country</a:t>
-            </a:r>
-          </a:p>
-          <a:p>
+              <a:rPr lang="en-US" b="1" dirty="0">
+                <a:solidFill>
+                  <a:srgbClr val="FF0000"/>
+                </a:solidFill>
+              </a:rPr>
+              <a:t>, country</a:t>
+            </a:r>
+          </a:p>
+          <a:p>
+            <a:pPr marL="285750" indent="-285750">
+              <a:buFont typeface="Arial" panose="020B0604020202020204" pitchFamily="34" charset="0"/>
+              <a:buChar char="•"/>
+            </a:pPr>
             <a:endParaRPr lang="en-US" dirty="0"/>
           </a:p>
           <a:p>
+            <a:pPr marL="285750" indent="-285750">
+              <a:buFont typeface="Arial" panose="020B0604020202020204" pitchFamily="34" charset="0"/>
+              <a:buChar char="•"/>
+            </a:pPr>
             <a:r>
               <a:rPr lang="en-US" dirty="0"/>
               <a:t>Target: class</a:t>
@@ -8066,6 +8137,10 @@
             <a:endParaRPr lang="en-US" dirty="0"/>
           </a:p>
           <a:p>
+            <a:pPr marL="285750" indent="-285750">
+              <a:buFont typeface="Arial" panose="020B0604020202020204" pitchFamily="34" charset="0"/>
+              <a:buChar char="•"/>
+            </a:pPr>
             <a:r>
               <a:rPr lang="en-US" dirty="0"/>
               <a:t>Fraud – </a:t>
@@ -8076,9 +8151,17 @@
             </a:r>
           </a:p>
           <a:p>
+            <a:pPr marL="285750" indent="-285750">
+              <a:buFont typeface="Arial" panose="020B0604020202020204" pitchFamily="34" charset="0"/>
+              <a:buChar char="•"/>
+            </a:pPr>
             <a:endParaRPr lang="en-US" dirty="0"/>
           </a:p>
           <a:p>
+            <a:pPr marL="285750" indent="-285750">
+              <a:buFont typeface="Arial" panose="020B0604020202020204" pitchFamily="34" charset="0"/>
+              <a:buChar char="•"/>
+            </a:pPr>
             <a:r>
               <a:rPr lang="en-US" dirty="0"/>
               <a:t>Valid = </a:t>
@@ -8106,7 +8189,11 @@
           <a:p>
             <a:r>
               <a:rPr lang="en-US" dirty="0"/>
-              <a:t>Accuracy – 90.5%  </a:t>
+              <a:t>Accuracy – </a:t>
+            </a:r>
+            <a:r>
+              <a:rPr lang="en-US" b="1" dirty="0"/>
+              <a:t>90.5%  </a:t>
             </a:r>
           </a:p>
           <a:p>
@@ -8118,7 +8205,7 @@
           <a:p>
             <a:r>
               <a:rPr lang="en-IN" dirty="0"/>
-              <a:t>Better metrics to look at instead – Precision, Recall and AUC-PR</a:t>
+              <a:t>Better metrics to look at instead – Precision and Recall</a:t>
             </a:r>
           </a:p>
         </p:txBody>
@@ -8628,7 +8715,7 @@
         </p:blipFill>
         <p:spPr>
           <a:xfrm>
-            <a:off x="1871489" y="2388028"/>
+            <a:off x="575345" y="2414798"/>
             <a:ext cx="4662020" cy="3986275"/>
           </a:xfrm>
           <a:prstGeom prst="rect">
@@ -8650,8 +8737,8 @@
         </p:nvSpPr>
         <p:spPr>
           <a:xfrm>
-            <a:off x="6840041" y="6093296"/>
-            <a:ext cx="3959722" cy="307777"/>
+            <a:off x="6119961" y="6093296"/>
+            <a:ext cx="4248472" cy="307777"/>
           </a:xfrm>
           <a:prstGeom prst="rect">
             <a:avLst/>
@@ -8665,10 +8752,10 @@
           <a:lstStyle/>
           <a:p>
             <a:r>
-              <a:rPr lang="en-US" sz="1400" dirty="0"/>
+              <a:rPr lang="en-US" sz="1400" b="1" dirty="0"/>
               <a:t>Combined dataset with geographical mapping </a:t>
             </a:r>
-            <a:endParaRPr lang="en-IN" sz="1400" dirty="0"/>
+            <a:endParaRPr lang="en-IN" sz="1400" b="1" dirty="0"/>
           </a:p>
         </p:txBody>
       </p:sp>
@@ -8698,6 +8785,415 @@
 </file>
 
 <file path=ppt/slides/slide15.xml><?xml version="1.0" encoding="utf-8"?>
+<p:sld xmlns:a="http://schemas.openxmlformats.org/drawingml/2006/main" xmlns:r="http://schemas.openxmlformats.org/officeDocument/2006/relationships" xmlns:p="http://schemas.openxmlformats.org/presentationml/2006/main">
+  <p:cSld>
+    <p:spTree>
+      <p:nvGrpSpPr>
+        <p:cNvPr id="1" name=""/>
+        <p:cNvGrpSpPr/>
+        <p:nvPr/>
+      </p:nvGrpSpPr>
+      <p:grpSpPr>
+        <a:xfrm>
+          <a:off x="0" y="0"/>
+          <a:ext cx="0" cy="0"/>
+          <a:chOff x="0" y="0"/>
+          <a:chExt cx="0" cy="0"/>
+        </a:xfrm>
+      </p:grpSpPr>
+      <p:pic>
+        <p:nvPicPr>
+          <p:cNvPr id="3" name="Picture 2">
+            <a:extLst>
+              <a:ext uri="{FF2B5EF4-FFF2-40B4-BE49-F238E27FC236}">
+                <a16:creationId xmlns:a16="http://schemas.microsoft.com/office/drawing/2014/main" id="{A1B88AC5-462C-6BE2-B812-F351C5FF4AB7}"/>
+              </a:ext>
+            </a:extLst>
+          </p:cNvPr>
+          <p:cNvPicPr>
+            <a:picLocks noChangeAspect="1"/>
+          </p:cNvPicPr>
+          <p:nvPr/>
+        </p:nvPicPr>
+        <p:blipFill>
+          <a:blip r:embed="rId2"/>
+          <a:srcRect l="22221" t="1350"/>
+          <a:stretch>
+            <a:fillRect/>
+          </a:stretch>
+        </p:blipFill>
+        <p:spPr>
+          <a:xfrm>
+            <a:off x="287313" y="1052736"/>
+            <a:ext cx="5040560" cy="5262302"/>
+          </a:xfrm>
+          <a:prstGeom prst="rect">
+            <a:avLst/>
+          </a:prstGeom>
+        </p:spPr>
+      </p:pic>
+      <p:graphicFrame>
+        <p:nvGraphicFramePr>
+          <p:cNvPr id="4" name="Table 3">
+            <a:extLst>
+              <a:ext uri="{FF2B5EF4-FFF2-40B4-BE49-F238E27FC236}">
+                <a16:creationId xmlns:a16="http://schemas.microsoft.com/office/drawing/2014/main" id="{9A81A842-0372-2E5C-EB94-4758538D204F}"/>
+              </a:ext>
+            </a:extLst>
+          </p:cNvPr>
+          <p:cNvGraphicFramePr>
+            <a:graphicFrameLocks noGrp="1"/>
+          </p:cNvGraphicFramePr>
+          <p:nvPr>
+            <p:extLst>
+              <p:ext uri="{D42A27DB-BD31-4B8C-83A1-F6EECF244321}">
+                <p14:modId xmlns:p14="http://schemas.microsoft.com/office/powerpoint/2010/main" val="1352097975"/>
+              </p:ext>
+            </p:extLst>
+          </p:nvPr>
+        </p:nvGraphicFramePr>
+        <p:xfrm>
+          <a:off x="6263977" y="2132856"/>
+          <a:ext cx="3888432" cy="2225040"/>
+        </p:xfrm>
+        <a:graphic>
+          <a:graphicData uri="http://schemas.openxmlformats.org/drawingml/2006/table">
+            <a:tbl>
+              <a:tblPr firstRow="1" bandRow="1">
+                <a:tableStyleId>{5940675A-B579-460E-94D1-54222C63F5DA}</a:tableStyleId>
+              </a:tblPr>
+              <a:tblGrid>
+                <a:gridCol w="2232248">
+                  <a:extLst>
+                    <a:ext uri="{9D8B030D-6E8A-4147-A177-3AD203B41FA5}">
+                      <a16:colId xmlns:a16="http://schemas.microsoft.com/office/drawing/2014/main" val="2861946110"/>
+                    </a:ext>
+                  </a:extLst>
+                </a:gridCol>
+                <a:gridCol w="1656184">
+                  <a:extLst>
+                    <a:ext uri="{9D8B030D-6E8A-4147-A177-3AD203B41FA5}">
+                      <a16:colId xmlns:a16="http://schemas.microsoft.com/office/drawing/2014/main" val="1842177093"/>
+                    </a:ext>
+                  </a:extLst>
+                </a:gridCol>
+              </a:tblGrid>
+              <a:tr h="370840">
+                <a:tc>
+                  <a:txBody>
+                    <a:bodyPr/>
+                    <a:lstStyle/>
+                    <a:p>
+                      <a:r>
+                        <a:rPr lang="en-US" b="1" dirty="0"/>
+                        <a:t>Country</a:t>
+                      </a:r>
+                      <a:endParaRPr lang="en-IN" b="1" dirty="0"/>
+                    </a:p>
+                  </a:txBody>
+                  <a:tcPr/>
+                </a:tc>
+                <a:tc>
+                  <a:txBody>
+                    <a:bodyPr/>
+                    <a:lstStyle/>
+                    <a:p>
+                      <a:r>
+                        <a:rPr lang="en-US" b="1" dirty="0"/>
+                        <a:t>Fraud Rate</a:t>
+                      </a:r>
+                      <a:endParaRPr lang="en-IN" b="1" dirty="0"/>
+                    </a:p>
+                  </a:txBody>
+                  <a:tcPr/>
+                </a:tc>
+                <a:extLst>
+                  <a:ext uri="{0D108BD9-81ED-4DB2-BD59-A6C34878D82A}">
+                    <a16:rowId xmlns:a16="http://schemas.microsoft.com/office/drawing/2014/main" val="857037235"/>
+                  </a:ext>
+                </a:extLst>
+              </a:tr>
+              <a:tr h="370840">
+                <a:tc>
+                  <a:txBody>
+                    <a:bodyPr/>
+                    <a:lstStyle/>
+                    <a:p>
+                      <a:r>
+                        <a:rPr lang="en-US" dirty="0"/>
+                        <a:t>United States</a:t>
+                      </a:r>
+                      <a:endParaRPr lang="en-IN" dirty="0"/>
+                    </a:p>
+                  </a:txBody>
+                  <a:tcPr/>
+                </a:tc>
+                <a:tc>
+                  <a:txBody>
+                    <a:bodyPr/>
+                    <a:lstStyle/>
+                    <a:p>
+                      <a:r>
+                        <a:rPr lang="en-US" dirty="0">
+                          <a:solidFill>
+                            <a:srgbClr val="FF0000"/>
+                          </a:solidFill>
+                        </a:rPr>
+                        <a:t>9.56%</a:t>
+                      </a:r>
+                      <a:endParaRPr lang="en-IN" dirty="0">
+                        <a:solidFill>
+                          <a:srgbClr val="FF0000"/>
+                        </a:solidFill>
+                      </a:endParaRPr>
+                    </a:p>
+                  </a:txBody>
+                  <a:tcPr/>
+                </a:tc>
+                <a:extLst>
+                  <a:ext uri="{0D108BD9-81ED-4DB2-BD59-A6C34878D82A}">
+                    <a16:rowId xmlns:a16="http://schemas.microsoft.com/office/drawing/2014/main" val="3773824330"/>
+                  </a:ext>
+                </a:extLst>
+              </a:tr>
+              <a:tr h="370840">
+                <a:tc>
+                  <a:txBody>
+                    <a:bodyPr/>
+                    <a:lstStyle/>
+                    <a:p>
+                      <a:r>
+                        <a:rPr lang="en-US" dirty="0"/>
+                        <a:t>China</a:t>
+                      </a:r>
+                      <a:endParaRPr lang="en-IN" dirty="0"/>
+                    </a:p>
+                  </a:txBody>
+                  <a:tcPr/>
+                </a:tc>
+                <a:tc>
+                  <a:txBody>
+                    <a:bodyPr/>
+                    <a:lstStyle/>
+                    <a:p>
+                      <a:r>
+                        <a:rPr lang="en-US" dirty="0">
+                          <a:solidFill>
+                            <a:srgbClr val="FF0000"/>
+                          </a:solidFill>
+                        </a:rPr>
+                        <a:t>8.66%</a:t>
+                      </a:r>
+                      <a:endParaRPr lang="en-IN" dirty="0">
+                        <a:solidFill>
+                          <a:srgbClr val="FF0000"/>
+                        </a:solidFill>
+                      </a:endParaRPr>
+                    </a:p>
+                  </a:txBody>
+                  <a:tcPr/>
+                </a:tc>
+                <a:extLst>
+                  <a:ext uri="{0D108BD9-81ED-4DB2-BD59-A6C34878D82A}">
+                    <a16:rowId xmlns:a16="http://schemas.microsoft.com/office/drawing/2014/main" val="4218507749"/>
+                  </a:ext>
+                </a:extLst>
+              </a:tr>
+              <a:tr h="370840">
+                <a:tc>
+                  <a:txBody>
+                    <a:bodyPr/>
+                    <a:lstStyle/>
+                    <a:p>
+                      <a:r>
+                        <a:rPr lang="en-US" dirty="0"/>
+                        <a:t>Japan</a:t>
+                      </a:r>
+                      <a:endParaRPr lang="en-IN" dirty="0"/>
+                    </a:p>
+                  </a:txBody>
+                  <a:tcPr/>
+                </a:tc>
+                <a:tc>
+                  <a:txBody>
+                    <a:bodyPr/>
+                    <a:lstStyle/>
+                    <a:p>
+                      <a:r>
+                        <a:rPr lang="en-US" dirty="0">
+                          <a:solidFill>
+                            <a:srgbClr val="FF0000"/>
+                          </a:solidFill>
+                        </a:rPr>
+                        <a:t>9.78%</a:t>
+                      </a:r>
+                      <a:endParaRPr lang="en-IN" dirty="0">
+                        <a:solidFill>
+                          <a:srgbClr val="FF0000"/>
+                        </a:solidFill>
+                      </a:endParaRPr>
+                    </a:p>
+                  </a:txBody>
+                  <a:tcPr/>
+                </a:tc>
+                <a:extLst>
+                  <a:ext uri="{0D108BD9-81ED-4DB2-BD59-A6C34878D82A}">
+                    <a16:rowId xmlns:a16="http://schemas.microsoft.com/office/drawing/2014/main" val="725846323"/>
+                  </a:ext>
+                </a:extLst>
+              </a:tr>
+              <a:tr h="370840">
+                <a:tc>
+                  <a:txBody>
+                    <a:bodyPr/>
+                    <a:lstStyle/>
+                    <a:p>
+                      <a:r>
+                        <a:rPr lang="en-US" dirty="0"/>
+                        <a:t>United Kingdom</a:t>
+                      </a:r>
+                      <a:endParaRPr lang="en-IN" dirty="0"/>
+                    </a:p>
+                  </a:txBody>
+                  <a:tcPr/>
+                </a:tc>
+                <a:tc>
+                  <a:txBody>
+                    <a:bodyPr/>
+                    <a:lstStyle/>
+                    <a:p>
+                      <a:r>
+                        <a:rPr lang="en-US" dirty="0">
+                          <a:solidFill>
+                            <a:srgbClr val="FF0000"/>
+                          </a:solidFill>
+                        </a:rPr>
+                        <a:t>10.62%</a:t>
+                      </a:r>
+                      <a:endParaRPr lang="en-IN" dirty="0">
+                        <a:solidFill>
+                          <a:srgbClr val="FF0000"/>
+                        </a:solidFill>
+                      </a:endParaRPr>
+                    </a:p>
+                  </a:txBody>
+                  <a:tcPr/>
+                </a:tc>
+                <a:extLst>
+                  <a:ext uri="{0D108BD9-81ED-4DB2-BD59-A6C34878D82A}">
+                    <a16:rowId xmlns:a16="http://schemas.microsoft.com/office/drawing/2014/main" val="1139607645"/>
+                  </a:ext>
+                </a:extLst>
+              </a:tr>
+              <a:tr h="370840">
+                <a:tc>
+                  <a:txBody>
+                    <a:bodyPr/>
+                    <a:lstStyle/>
+                    <a:p>
+                      <a:r>
+                        <a:rPr lang="en-US" dirty="0"/>
+                        <a:t>Korea</a:t>
+                      </a:r>
+                      <a:endParaRPr lang="en-IN" dirty="0"/>
+                    </a:p>
+                  </a:txBody>
+                  <a:tcPr/>
+                </a:tc>
+                <a:tc>
+                  <a:txBody>
+                    <a:bodyPr/>
+                    <a:lstStyle/>
+                    <a:p>
+                      <a:r>
+                        <a:rPr lang="en-US" dirty="0">
+                          <a:solidFill>
+                            <a:srgbClr val="FF0000"/>
+                          </a:solidFill>
+                        </a:rPr>
+                        <a:t>9.13%</a:t>
+                      </a:r>
+                      <a:endParaRPr lang="en-IN" dirty="0">
+                        <a:solidFill>
+                          <a:srgbClr val="FF0000"/>
+                        </a:solidFill>
+                      </a:endParaRPr>
+                    </a:p>
+                  </a:txBody>
+                  <a:tcPr/>
+                </a:tc>
+                <a:extLst>
+                  <a:ext uri="{0D108BD9-81ED-4DB2-BD59-A6C34878D82A}">
+                    <a16:rowId xmlns:a16="http://schemas.microsoft.com/office/drawing/2014/main" val="4247506403"/>
+                  </a:ext>
+                </a:extLst>
+              </a:tr>
+            </a:tbl>
+          </a:graphicData>
+        </a:graphic>
+      </p:graphicFrame>
+      <p:sp>
+        <p:nvSpPr>
+          <p:cNvPr id="5" name="TextBox 4">
+            <a:extLst>
+              <a:ext uri="{FF2B5EF4-FFF2-40B4-BE49-F238E27FC236}">
+                <a16:creationId xmlns:a16="http://schemas.microsoft.com/office/drawing/2014/main" id="{6A3AFC35-E04D-0F41-8FDD-DFDAD1070CCC}"/>
+              </a:ext>
+            </a:extLst>
+          </p:cNvPr>
+          <p:cNvSpPr txBox="1"/>
+          <p:nvPr/>
+        </p:nvSpPr>
+        <p:spPr>
+          <a:xfrm>
+            <a:off x="6705217" y="4581128"/>
+            <a:ext cx="3249608" cy="369332"/>
+          </a:xfrm>
+          <a:prstGeom prst="rect">
+            <a:avLst/>
+          </a:prstGeom>
+          <a:noFill/>
+        </p:spPr>
+        <p:txBody>
+          <a:bodyPr wrap="none" rtlCol="0">
+            <a:spAutoFit/>
+          </a:bodyPr>
+          <a:lstStyle/>
+          <a:p>
+            <a:r>
+              <a:rPr lang="en-US" b="1" dirty="0"/>
+              <a:t>Country wise fraud patterns</a:t>
+            </a:r>
+            <a:endParaRPr lang="en-IN" b="1" dirty="0"/>
+          </a:p>
+        </p:txBody>
+      </p:sp>
+    </p:spTree>
+    <p:extLst>
+      <p:ext uri="{BB962C8B-B14F-4D97-AF65-F5344CB8AC3E}">
+        <p14:creationId xmlns:p14="http://schemas.microsoft.com/office/powerpoint/2010/main" val="1550306943"/>
+      </p:ext>
+    </p:extLst>
+  </p:cSld>
+  <p:clrMapOvr>
+    <a:masterClrMapping/>
+  </p:clrMapOvr>
+  <mc:AlternateContent xmlns:mc="http://schemas.openxmlformats.org/markup-compatibility/2006" xmlns:p14="http://schemas.microsoft.com/office/powerpoint/2010/main">
+    <mc:Choice Requires="p14">
+      <p:transition p14:dur="100">
+        <p:cut/>
+      </p:transition>
+    </mc:Choice>
+    <mc:Fallback xmlns="">
+      <p:transition>
+        <p:cut/>
+      </p:transition>
+    </mc:Fallback>
+  </mc:AlternateContent>
+</p:sld>
+</file>
+
+<file path=ppt/slides/slide16.xml><?xml version="1.0" encoding="utf-8"?>
 <p:sld xmlns:a="http://schemas.openxmlformats.org/drawingml/2006/main" xmlns:r="http://schemas.openxmlformats.org/officeDocument/2006/relationships" xmlns:p="http://schemas.openxmlformats.org/presentationml/2006/main">
   <p:cSld>
     <p:spTree>
@@ -8971,7 +9467,7 @@
 </p:sld>
 </file>
 
-<file path=ppt/slides/slide16.xml><?xml version="1.0" encoding="utf-8"?>
+<file path=ppt/slides/slide17.xml><?xml version="1.0" encoding="utf-8"?>
 <p:sld xmlns:a="http://schemas.openxmlformats.org/drawingml/2006/main" xmlns:r="http://schemas.openxmlformats.org/officeDocument/2006/relationships" xmlns:p="http://schemas.openxmlformats.org/presentationml/2006/main">
   <p:cSld>
     <p:spTree>
@@ -9085,7 +9581,7 @@
 </p:sld>
 </file>
 
-<file path=ppt/slides/slide17.xml><?xml version="1.0" encoding="utf-8"?>
+<file path=ppt/slides/slide18.xml><?xml version="1.0" encoding="utf-8"?>
 <p:sld xmlns:a="http://schemas.openxmlformats.org/drawingml/2006/main" xmlns:r="http://schemas.openxmlformats.org/officeDocument/2006/relationships" xmlns:p="http://schemas.openxmlformats.org/presentationml/2006/main">
   <p:cSld>
     <p:spTree>
@@ -9505,16 +10001,27 @@
           <a:p>
             <a:pPr algn="ctr"/>
             <a:r>
-              <a:rPr lang="en-US" sz="1400" dirty="0">
+              <a:rPr lang="en-US" sz="1400" b="1" dirty="0">
                 <a:solidFill>
-                  <a:schemeClr val="tx1"/>
+                  <a:srgbClr val="FF0000"/>
                 </a:solidFill>
               </a:rPr>
               <a:t>12am – 2am</a:t>
             </a:r>
-            <a:endParaRPr lang="en-IN" sz="1400" dirty="0">
+          </a:p>
+          <a:p>
+            <a:pPr algn="ctr"/>
+            <a:r>
+              <a:rPr lang="en-US" sz="1400" b="1" dirty="0">
+                <a:solidFill>
+                  <a:srgbClr val="FF0000"/>
+                </a:solidFill>
+              </a:rPr>
+              <a:t>( 0 – 2)</a:t>
+            </a:r>
+            <a:endParaRPr lang="en-IN" sz="1400" b="1" dirty="0">
               <a:solidFill>
-                <a:schemeClr val="tx1"/>
+                <a:srgbClr val="FF0000"/>
               </a:solidFill>
             </a:endParaRPr>
           </a:p>
@@ -9889,6 +10396,17 @@
               </a:rPr>
               <a:t>12pm – 9:59 pm</a:t>
             </a:r>
+          </a:p>
+          <a:p>
+            <a:pPr algn="ctr"/>
+            <a:r>
+              <a:rPr lang="en-US" sz="1400" dirty="0">
+                <a:solidFill>
+                  <a:schemeClr val="tx1"/>
+                </a:solidFill>
+              </a:rPr>
+              <a:t>(12-21)</a:t>
+            </a:r>
             <a:endParaRPr lang="en-IN" sz="1400" dirty="0">
               <a:solidFill>
                 <a:schemeClr val="tx1"/>
@@ -9996,7 +10514,7 @@
         <p:spPr>
           <a:xfrm>
             <a:off x="8015717" y="3338414"/>
-            <a:ext cx="1414610" cy="653741"/>
+            <a:ext cx="1475845" cy="653741"/>
           </a:xfrm>
           <a:prstGeom prst="straightConnector1">
             <a:avLst/>
@@ -10035,7 +10553,7 @@
         <p:spPr>
           <a:xfrm>
             <a:off x="8758707" y="3992155"/>
-            <a:ext cx="1343240" cy="978661"/>
+            <a:ext cx="1465710" cy="1035837"/>
           </a:xfrm>
           <a:prstGeom prst="ellipse">
             <a:avLst/>
@@ -10063,16 +10581,31 @@
           <a:p>
             <a:pPr algn="ctr"/>
             <a:r>
-              <a:rPr lang="en-US" sz="1400" dirty="0">
+              <a:rPr lang="en-US" sz="1400" b="1" dirty="0">
                 <a:solidFill>
-                  <a:schemeClr val="tx1"/>
+                  <a:srgbClr val="FF0000"/>
                 </a:solidFill>
               </a:rPr>
               <a:t>10pm – 11:59pm</a:t>
             </a:r>
-            <a:endParaRPr lang="en-IN" sz="1400" dirty="0">
+            <a:br>
+              <a:rPr lang="en-US" sz="1400" b="1" dirty="0">
+                <a:solidFill>
+                  <a:srgbClr val="FF0000"/>
+                </a:solidFill>
+              </a:rPr>
+            </a:br>
+            <a:r>
+              <a:rPr lang="en-US" sz="1400" b="1" dirty="0">
+                <a:solidFill>
+                  <a:srgbClr val="FF0000"/>
+                </a:solidFill>
+              </a:rPr>
+              <a:t>(22-23:59)</a:t>
+            </a:r>
+            <a:endParaRPr lang="en-IN" sz="1400" b="1" dirty="0">
               <a:solidFill>
-                <a:schemeClr val="tx1"/>
+                <a:srgbClr val="FF0000"/>
               </a:solidFill>
             </a:endParaRPr>
           </a:p>
@@ -10219,7 +10752,7 @@
 </p:sld>
 </file>
 
-<file path=ppt/slides/slide18.xml><?xml version="1.0" encoding="utf-8"?>
+<file path=ppt/slides/slide19.xml><?xml version="1.0" encoding="utf-8"?>
 <p:sld xmlns:a="http://schemas.openxmlformats.org/drawingml/2006/main" xmlns:r="http://schemas.openxmlformats.org/officeDocument/2006/relationships" xmlns:p="http://schemas.openxmlformats.org/presentationml/2006/main">
   <p:cSld>
     <p:spTree>
@@ -10259,7 +10792,7 @@
         </p:blipFill>
         <p:spPr>
           <a:xfrm>
-            <a:off x="3959721" y="1294815"/>
+            <a:off x="3995014" y="1258599"/>
             <a:ext cx="6768753" cy="4193255"/>
           </a:xfrm>
           <a:prstGeom prst="rect">
@@ -10282,13 +10815,13 @@
           <p:nvPr>
             <p:extLst>
               <p:ext uri="{D42A27DB-BD31-4B8C-83A1-F6EECF244321}">
-                <p14:modId xmlns:p14="http://schemas.microsoft.com/office/powerpoint/2010/main" val="2988877112"/>
+                <p14:modId xmlns:p14="http://schemas.microsoft.com/office/powerpoint/2010/main" val="1375116566"/>
               </p:ext>
             </p:extLst>
           </p:nvPr>
         </p:nvGraphicFramePr>
         <p:xfrm>
-          <a:off x="215305" y="1916832"/>
+          <a:off x="143297" y="2708920"/>
           <a:ext cx="3672408" cy="3110029"/>
         </p:xfrm>
         <a:graphic>
@@ -10745,172 +11278,419 @@
           </a:p>
         </p:txBody>
       </p:sp>
+      <mc:AlternateContent xmlns:mc="http://schemas.openxmlformats.org/markup-compatibility/2006" xmlns:a14="http://schemas.microsoft.com/office/drawing/2010/main">
+        <mc:Choice Requires="a14">
+          <p:sp>
+            <p:nvSpPr>
+              <p:cNvPr id="3" name="TextBox 2">
+                <a:extLst>
+                  <a:ext uri="{FF2B5EF4-FFF2-40B4-BE49-F238E27FC236}">
+                    <a16:creationId xmlns:a16="http://schemas.microsoft.com/office/drawing/2014/main" id="{C956C178-182A-D2D8-C585-17C4512F2345}"/>
+                  </a:ext>
+                </a:extLst>
+              </p:cNvPr>
+              <p:cNvSpPr txBox="1"/>
+              <p:nvPr/>
+            </p:nvSpPr>
+            <p:spPr>
+              <a:xfrm>
+                <a:off x="359321" y="1053145"/>
+                <a:ext cx="3059629" cy="714683"/>
+              </a:xfrm>
+              <a:prstGeom prst="rect">
+                <a:avLst/>
+              </a:prstGeom>
+              <a:noFill/>
+            </p:spPr>
+            <p:txBody>
+              <a:bodyPr wrap="square">
+                <a:spAutoFit/>
+              </a:bodyPr>
+              <a:lstStyle/>
+              <a:p>
+                <a:pPr>
+                  <a:buNone/>
+                </a:pPr>
+                <a14:m>
+                  <m:oMathPara xmlns:m="http://schemas.openxmlformats.org/officeDocument/2006/math">
+                    <m:oMathParaPr>
+                      <m:jc m:val="centerGroup"/>
+                    </m:oMathParaPr>
+                    <m:oMath xmlns:m="http://schemas.openxmlformats.org/officeDocument/2006/math">
+                      <m:r>
+                        <m:rPr>
+                          <m:nor/>
+                        </m:rPr>
+                        <a:rPr lang="en-IN" b="0"/>
+                        <m:t>cos</m:t>
+                      </m:r>
+                      <m:r>
+                        <m:rPr>
+                          <m:lit/>
+                          <m:nor/>
+                        </m:rPr>
+                        <a:rPr lang="en-IN" b="0" i="1"/>
+                        <m:t>_</m:t>
+                      </m:r>
+                      <m:r>
+                        <m:rPr>
+                          <m:nor/>
+                        </m:rPr>
+                        <a:rPr lang="en-IN" b="0" i="1"/>
+                        <m:t>hour</m:t>
+                      </m:r>
+                      <m:r>
+                        <a:rPr lang="en-IN" b="0" i="0">
+                          <a:latin typeface="Cambria Math" panose="02040503050406030204" pitchFamily="18" charset="0"/>
+                        </a:rPr>
+                        <m:t>=</m:t>
+                      </m:r>
+                      <m:func>
+                        <m:funcPr>
+                          <m:ctrlPr>
+                            <a:rPr lang="ar-AE" b="0" i="1">
+                              <a:latin typeface="Cambria Math" panose="02040503050406030204" pitchFamily="18" charset="0"/>
+                            </a:rPr>
+                          </m:ctrlPr>
+                        </m:funcPr>
+                        <m:fName>
+                          <m:r>
+                            <m:rPr>
+                              <m:sty m:val="p"/>
+                            </m:rPr>
+                            <a:rPr lang="en-IN" b="0" i="0">
+                              <a:latin typeface="Cambria Math" panose="02040503050406030204" pitchFamily="18" charset="0"/>
+                            </a:rPr>
+                            <m:t>cos</m:t>
+                          </m:r>
+                        </m:fName>
+                        <m:e>
+                          <m:d>
+                            <m:dPr>
+                              <m:ctrlPr>
+                                <a:rPr lang="ar-AE" b="0" i="1">
+                                  <a:latin typeface="Cambria Math" panose="02040503050406030204" pitchFamily="18" charset="0"/>
+                                </a:rPr>
+                              </m:ctrlPr>
+                            </m:dPr>
+                            <m:e>
+                              <m:f>
+                                <m:fPr>
+                                  <m:ctrlPr>
+                                    <a:rPr lang="ar-AE" b="0" i="1">
+                                      <a:latin typeface="Cambria Math" panose="02040503050406030204" pitchFamily="18" charset="0"/>
+                                    </a:rPr>
+                                  </m:ctrlPr>
+                                </m:fPr>
+                                <m:num>
+                                  <m:r>
+                                    <a:rPr lang="ar-AE" b="0" i="0">
+                                      <a:latin typeface="Cambria Math" panose="02040503050406030204" pitchFamily="18" charset="0"/>
+                                    </a:rPr>
+                                    <m:t>2</m:t>
+                                  </m:r>
+                                  <m:r>
+                                    <a:rPr lang="ar-AE" b="0" i="1">
+                                      <a:latin typeface="Cambria Math" panose="02040503050406030204" pitchFamily="18" charset="0"/>
+                                    </a:rPr>
+                                    <m:t>𝜋</m:t>
+                                  </m:r>
+                                  <m:r>
+                                    <a:rPr lang="ar-AE" b="0" i="0">
+                                      <a:latin typeface="Cambria Math" panose="02040503050406030204" pitchFamily="18" charset="0"/>
+                                    </a:rPr>
+                                    <m:t>⋅</m:t>
+                                  </m:r>
+                                  <m:r>
+                                    <m:rPr>
+                                      <m:nor/>
+                                    </m:rPr>
+                                    <a:rPr lang="en-IN" b="0" i="1">
+                                      <a:latin typeface="Cambria Math" panose="02040503050406030204" pitchFamily="18" charset="0"/>
+                                    </a:rPr>
+                                    <m:t>hour</m:t>
+                                  </m:r>
+                                </m:num>
+                                <m:den>
+                                  <m:r>
+                                    <a:rPr lang="ar-AE" b="0" i="0">
+                                      <a:latin typeface="Cambria Math" panose="02040503050406030204" pitchFamily="18" charset="0"/>
+                                    </a:rPr>
+                                    <m:t>24</m:t>
+                                  </m:r>
+                                </m:den>
+                              </m:f>
+                            </m:e>
+                          </m:d>
+                        </m:e>
+                      </m:func>
+                    </m:oMath>
+                  </m:oMathPara>
+                </a14:m>
+                <a:endParaRPr lang="ar-AE" b="0" dirty="0"/>
+              </a:p>
+            </p:txBody>
+          </p:sp>
+        </mc:Choice>
+        <mc:Fallback xmlns="">
+          <p:sp>
+            <p:nvSpPr>
+              <p:cNvPr id="3" name="TextBox 2">
+                <a:extLst>
+                  <a:ext uri="{FF2B5EF4-FFF2-40B4-BE49-F238E27FC236}">
+                    <a16:creationId xmlns:a16="http://schemas.microsoft.com/office/drawing/2014/main" id="{C956C178-182A-D2D8-C585-17C4512F2345}"/>
+                  </a:ext>
+                </a:extLst>
+              </p:cNvPr>
+              <p:cNvSpPr txBox="1">
+                <a:spLocks noRot="1" noChangeAspect="1" noMove="1" noResize="1" noEditPoints="1" noAdjustHandles="1" noChangeArrowheads="1" noChangeShapeType="1" noTextEdit="1"/>
+              </p:cNvSpPr>
+              <p:nvPr/>
+            </p:nvSpPr>
+            <p:spPr>
+              <a:xfrm>
+                <a:off x="359321" y="1053145"/>
+                <a:ext cx="3059629" cy="714683"/>
+              </a:xfrm>
+              <a:prstGeom prst="rect">
+                <a:avLst/>
+              </a:prstGeom>
+              <a:blipFill>
+                <a:blip r:embed="rId3"/>
+                <a:stretch>
+                  <a:fillRect/>
+                </a:stretch>
+              </a:blipFill>
+            </p:spPr>
+            <p:txBody>
+              <a:bodyPr/>
+              <a:lstStyle/>
+              <a:p>
+                <a:r>
+                  <a:rPr lang="en-IN">
+                    <a:noFill/>
+                  </a:rPr>
+                  <a:t> </a:t>
+                </a:r>
+              </a:p>
+            </p:txBody>
+          </p:sp>
+        </mc:Fallback>
+      </mc:AlternateContent>
+      <mc:AlternateContent xmlns:mc="http://schemas.openxmlformats.org/markup-compatibility/2006" xmlns:a14="http://schemas.microsoft.com/office/drawing/2010/main">
+        <mc:Choice Requires="a14">
+          <p:sp>
+            <p:nvSpPr>
+              <p:cNvPr id="9" name="TextBox 8">
+                <a:extLst>
+                  <a:ext uri="{FF2B5EF4-FFF2-40B4-BE49-F238E27FC236}">
+                    <a16:creationId xmlns:a16="http://schemas.microsoft.com/office/drawing/2014/main" id="{C99B8B6A-12B8-9EB1-A60E-27C5F8D5CDD6}"/>
+                  </a:ext>
+                </a:extLst>
+              </p:cNvPr>
+              <p:cNvSpPr txBox="1"/>
+              <p:nvPr/>
+            </p:nvSpPr>
+            <p:spPr>
+              <a:xfrm>
+                <a:off x="394614" y="1767828"/>
+                <a:ext cx="3024336" cy="714683"/>
+              </a:xfrm>
+              <a:prstGeom prst="rect">
+                <a:avLst/>
+              </a:prstGeom>
+              <a:noFill/>
+            </p:spPr>
+            <p:txBody>
+              <a:bodyPr wrap="square">
+                <a:spAutoFit/>
+              </a:bodyPr>
+              <a:lstStyle/>
+              <a:p>
+                <a:pPr>
+                  <a:buNone/>
+                </a:pPr>
+                <a14:m>
+                  <m:oMathPara xmlns:m="http://schemas.openxmlformats.org/officeDocument/2006/math">
+                    <m:oMathParaPr>
+                      <m:jc m:val="centerGroup"/>
+                    </m:oMathParaPr>
+                    <m:oMath xmlns:m="http://schemas.openxmlformats.org/officeDocument/2006/math">
+                      <m:r>
+                        <m:rPr>
+                          <m:nor/>
+                        </m:rPr>
+                        <a:rPr lang="en-IN" smtClean="0">
+                          <a:latin typeface="Cambria Math" panose="02040503050406030204" pitchFamily="18" charset="0"/>
+                        </a:rPr>
+                        <m:t>s</m:t>
+                      </m:r>
+                      <m:r>
+                        <m:rPr>
+                          <m:nor/>
+                        </m:rPr>
+                        <a:rPr lang="en-US" b="0" i="0" smtClean="0">
+                          <a:latin typeface="Cambria Math" panose="02040503050406030204" pitchFamily="18" charset="0"/>
+                        </a:rPr>
+                        <m:t>in</m:t>
+                      </m:r>
+                      <m:r>
+                        <m:rPr>
+                          <m:lit/>
+                          <m:nor/>
+                        </m:rPr>
+                        <a:rPr lang="en-IN" b="0" i="1" smtClean="0"/>
+                        <m:t>_</m:t>
+                      </m:r>
+                      <m:r>
+                        <m:rPr>
+                          <m:nor/>
+                        </m:rPr>
+                        <a:rPr lang="en-IN" b="0" i="1" smtClean="0"/>
+                        <m:t>hour</m:t>
+                      </m:r>
+                      <m:r>
+                        <a:rPr lang="en-IN" b="0" i="0">
+                          <a:latin typeface="Cambria Math" panose="02040503050406030204" pitchFamily="18" charset="0"/>
+                        </a:rPr>
+                        <m:t>=</m:t>
+                      </m:r>
+                      <m:func>
+                        <m:funcPr>
+                          <m:ctrlPr>
+                            <a:rPr lang="ar-AE" b="0" i="1">
+                              <a:latin typeface="Cambria Math" panose="02040503050406030204" pitchFamily="18" charset="0"/>
+                            </a:rPr>
+                          </m:ctrlPr>
+                        </m:funcPr>
+                        <m:fName>
+                          <m:r>
+                            <m:rPr>
+                              <m:sty m:val="p"/>
+                            </m:rPr>
+                            <a:rPr lang="en-US" b="0" i="0" smtClean="0">
+                              <a:latin typeface="Cambria Math" panose="02040503050406030204" pitchFamily="18" charset="0"/>
+                            </a:rPr>
+                            <m:t>sin</m:t>
+                          </m:r>
+                        </m:fName>
+                        <m:e>
+                          <m:d>
+                            <m:dPr>
+                              <m:ctrlPr>
+                                <a:rPr lang="ar-AE" b="0" i="1">
+                                  <a:latin typeface="Cambria Math" panose="02040503050406030204" pitchFamily="18" charset="0"/>
+                                </a:rPr>
+                              </m:ctrlPr>
+                            </m:dPr>
+                            <m:e>
+                              <m:f>
+                                <m:fPr>
+                                  <m:ctrlPr>
+                                    <a:rPr lang="ar-AE" b="0" i="1">
+                                      <a:latin typeface="Cambria Math" panose="02040503050406030204" pitchFamily="18" charset="0"/>
+                                    </a:rPr>
+                                  </m:ctrlPr>
+                                </m:fPr>
+                                <m:num>
+                                  <m:r>
+                                    <a:rPr lang="ar-AE" b="0" i="0">
+                                      <a:latin typeface="Cambria Math" panose="02040503050406030204" pitchFamily="18" charset="0"/>
+                                    </a:rPr>
+                                    <m:t>2</m:t>
+                                  </m:r>
+                                  <m:r>
+                                    <a:rPr lang="ar-AE" b="0" i="1">
+                                      <a:latin typeface="Cambria Math" panose="02040503050406030204" pitchFamily="18" charset="0"/>
+                                    </a:rPr>
+                                    <m:t>𝜋</m:t>
+                                  </m:r>
+                                  <m:r>
+                                    <a:rPr lang="ar-AE" b="0" i="0">
+                                      <a:latin typeface="Cambria Math" panose="02040503050406030204" pitchFamily="18" charset="0"/>
+                                    </a:rPr>
+                                    <m:t>⋅</m:t>
+                                  </m:r>
+                                  <m:r>
+                                    <m:rPr>
+                                      <m:nor/>
+                                    </m:rPr>
+                                    <a:rPr lang="en-IN" b="0" i="1">
+                                      <a:latin typeface="Cambria Math" panose="02040503050406030204" pitchFamily="18" charset="0"/>
+                                    </a:rPr>
+                                    <m:t>hour</m:t>
+                                  </m:r>
+                                </m:num>
+                                <m:den>
+                                  <m:r>
+                                    <a:rPr lang="ar-AE" b="0" i="0">
+                                      <a:latin typeface="Cambria Math" panose="02040503050406030204" pitchFamily="18" charset="0"/>
+                                    </a:rPr>
+                                    <m:t>24</m:t>
+                                  </m:r>
+                                </m:den>
+                              </m:f>
+                            </m:e>
+                          </m:d>
+                        </m:e>
+                      </m:func>
+                    </m:oMath>
+                  </m:oMathPara>
+                </a14:m>
+                <a:endParaRPr lang="ar-AE" b="0" dirty="0"/>
+              </a:p>
+            </p:txBody>
+          </p:sp>
+        </mc:Choice>
+        <mc:Fallback xmlns="">
+          <p:sp>
+            <p:nvSpPr>
+              <p:cNvPr id="9" name="TextBox 8">
+                <a:extLst>
+                  <a:ext uri="{FF2B5EF4-FFF2-40B4-BE49-F238E27FC236}">
+                    <a16:creationId xmlns:a16="http://schemas.microsoft.com/office/drawing/2014/main" id="{C99B8B6A-12B8-9EB1-A60E-27C5F8D5CDD6}"/>
+                  </a:ext>
+                </a:extLst>
+              </p:cNvPr>
+              <p:cNvSpPr txBox="1">
+                <a:spLocks noRot="1" noChangeAspect="1" noMove="1" noResize="1" noEditPoints="1" noAdjustHandles="1" noChangeArrowheads="1" noChangeShapeType="1" noTextEdit="1"/>
+              </p:cNvSpPr>
+              <p:nvPr/>
+            </p:nvSpPr>
+            <p:spPr>
+              <a:xfrm>
+                <a:off x="394614" y="1767828"/>
+                <a:ext cx="3024336" cy="714683"/>
+              </a:xfrm>
+              <a:prstGeom prst="rect">
+                <a:avLst/>
+              </a:prstGeom>
+              <a:blipFill>
+                <a:blip r:embed="rId4"/>
+                <a:stretch>
+                  <a:fillRect/>
+                </a:stretch>
+              </a:blipFill>
+            </p:spPr>
+            <p:txBody>
+              <a:bodyPr/>
+              <a:lstStyle/>
+              <a:p>
+                <a:r>
+                  <a:rPr lang="en-IN">
+                    <a:noFill/>
+                  </a:rPr>
+                  <a:t> </a:t>
+                </a:r>
+              </a:p>
+            </p:txBody>
+          </p:sp>
+        </mc:Fallback>
+      </mc:AlternateContent>
     </p:spTree>
     <p:extLst>
       <p:ext uri="{BB962C8B-B14F-4D97-AF65-F5344CB8AC3E}">
         <p14:creationId xmlns:p14="http://schemas.microsoft.com/office/powerpoint/2010/main" val="2770197975"/>
-      </p:ext>
-    </p:extLst>
-  </p:cSld>
-  <p:clrMapOvr>
-    <a:masterClrMapping/>
-  </p:clrMapOvr>
-  <mc:AlternateContent xmlns:mc="http://schemas.openxmlformats.org/markup-compatibility/2006" xmlns:p14="http://schemas.microsoft.com/office/powerpoint/2010/main">
-    <mc:Choice Requires="p14">
-      <p:transition p14:dur="100">
-        <p:cut/>
-      </p:transition>
-    </mc:Choice>
-    <mc:Fallback xmlns="">
-      <p:transition>
-        <p:cut/>
-      </p:transition>
-    </mc:Fallback>
-  </mc:AlternateContent>
-</p:sld>
-</file>
-
-<file path=ppt/slides/slide19.xml><?xml version="1.0" encoding="utf-8"?>
-<p:sld xmlns:a="http://schemas.openxmlformats.org/drawingml/2006/main" xmlns:r="http://schemas.openxmlformats.org/officeDocument/2006/relationships" xmlns:p="http://schemas.openxmlformats.org/presentationml/2006/main">
-  <p:cSld>
-    <p:spTree>
-      <p:nvGrpSpPr>
-        <p:cNvPr id="1" name="">
-          <a:extLst>
-            <a:ext uri="{FF2B5EF4-FFF2-40B4-BE49-F238E27FC236}">
-              <a16:creationId xmlns:a16="http://schemas.microsoft.com/office/drawing/2014/main" id="{E65220F6-DAF2-6E23-B603-B9293D04A6E5}"/>
-            </a:ext>
-          </a:extLst>
-        </p:cNvPr>
-        <p:cNvGrpSpPr/>
-        <p:nvPr/>
-      </p:nvGrpSpPr>
-      <p:grpSpPr>
-        <a:xfrm>
-          <a:off x="0" y="0"/>
-          <a:ext cx="0" cy="0"/>
-          <a:chOff x="0" y="0"/>
-          <a:chExt cx="0" cy="0"/>
-        </a:xfrm>
-      </p:grpSpPr>
-      <p:sp>
-        <p:nvSpPr>
-          <p:cNvPr id="3" name="TextBox 2">
-            <a:extLst>
-              <a:ext uri="{FF2B5EF4-FFF2-40B4-BE49-F238E27FC236}">
-                <a16:creationId xmlns:a16="http://schemas.microsoft.com/office/drawing/2014/main" id="{ADD26835-DAEE-DFA5-550D-947BE98CD584}"/>
-              </a:ext>
-            </a:extLst>
-          </p:cNvPr>
-          <p:cNvSpPr txBox="1"/>
-          <p:nvPr/>
-        </p:nvSpPr>
-        <p:spPr>
-          <a:xfrm>
-            <a:off x="6912049" y="188640"/>
-            <a:ext cx="3594831" cy="461665"/>
-          </a:xfrm>
-          <a:prstGeom prst="rect">
-            <a:avLst/>
-          </a:prstGeom>
-          <a:noFill/>
-        </p:spPr>
-        <p:txBody>
-          <a:bodyPr wrap="square" rtlCol="0">
-            <a:spAutoFit/>
-          </a:bodyPr>
-          <a:lstStyle/>
-          <a:p>
-            <a:pPr algn="ctr"/>
-            <a:r>
-              <a:rPr lang="en-IN" sz="2400" b="1" dirty="0">
-                <a:solidFill>
-                  <a:srgbClr val="D47D26"/>
-                </a:solidFill>
-                <a:latin typeface="Times New Roman" panose="02020603050405020304" pitchFamily="18" charset="0"/>
-                <a:cs typeface="Times New Roman" panose="02020603050405020304" pitchFamily="18" charset="0"/>
-              </a:rPr>
-              <a:t>IMPLEMENTATION</a:t>
-            </a:r>
-          </a:p>
-        </p:txBody>
-      </p:sp>
-      <p:pic>
-        <p:nvPicPr>
-          <p:cNvPr id="4" name="Picture 3" descr="A graph of an equation&#10;&#10;AI-generated content may be incorrect.">
-            <a:extLst>
-              <a:ext uri="{FF2B5EF4-FFF2-40B4-BE49-F238E27FC236}">
-                <a16:creationId xmlns:a16="http://schemas.microsoft.com/office/drawing/2014/main" id="{851D173B-DA75-7DCF-3BD3-B025A34CD356}"/>
-              </a:ext>
-            </a:extLst>
-          </p:cNvPr>
-          <p:cNvPicPr>
-            <a:picLocks noChangeAspect="1"/>
-          </p:cNvPicPr>
-          <p:nvPr/>
-        </p:nvPicPr>
-        <p:blipFill>
-          <a:blip r:embed="rId3">
-            <a:extLst>
-              <a:ext uri="{28A0092B-C50C-407E-A947-70E740481C1C}">
-                <a14:useLocalDpi xmlns:a14="http://schemas.microsoft.com/office/drawing/2010/main" val="0"/>
-              </a:ext>
-            </a:extLst>
-          </a:blip>
-          <a:stretch>
-            <a:fillRect/>
-          </a:stretch>
-        </p:blipFill>
-        <p:spPr>
-          <a:xfrm>
-            <a:off x="2375545" y="908720"/>
-            <a:ext cx="5134366" cy="5262382"/>
-          </a:xfrm>
-          <a:prstGeom prst="rect">
-            <a:avLst/>
-          </a:prstGeom>
-        </p:spPr>
-      </p:pic>
-      <p:sp>
-        <p:nvSpPr>
-          <p:cNvPr id="6" name="TextBox 5">
-            <a:extLst>
-              <a:ext uri="{FF2B5EF4-FFF2-40B4-BE49-F238E27FC236}">
-                <a16:creationId xmlns:a16="http://schemas.microsoft.com/office/drawing/2014/main" id="{A63F3F38-F7ED-293C-0F8E-FCE62862F5D4}"/>
-              </a:ext>
-            </a:extLst>
-          </p:cNvPr>
-          <p:cNvSpPr txBox="1"/>
-          <p:nvPr/>
-        </p:nvSpPr>
-        <p:spPr>
-          <a:xfrm>
-            <a:off x="3599681" y="6138378"/>
-            <a:ext cx="3095719" cy="369332"/>
-          </a:xfrm>
-          <a:prstGeom prst="rect">
-            <a:avLst/>
-          </a:prstGeom>
-          <a:noFill/>
-        </p:spPr>
-        <p:txBody>
-          <a:bodyPr wrap="none" rtlCol="0">
-            <a:spAutoFit/>
-          </a:bodyPr>
-          <a:lstStyle/>
-          <a:p>
-            <a:r>
-              <a:rPr lang="en-US" dirty="0"/>
-              <a:t>Cyclic representation of time</a:t>
-            </a:r>
-            <a:endParaRPr lang="en-IN" dirty="0"/>
-          </a:p>
-        </p:txBody>
-      </p:sp>
-    </p:spTree>
-    <p:extLst>
-      <p:ext uri="{BB962C8B-B14F-4D97-AF65-F5344CB8AC3E}">
-        <p14:creationId xmlns:p14="http://schemas.microsoft.com/office/powerpoint/2010/main" val="942771469"/>
       </p:ext>
     </p:extLst>
   </p:cSld>
@@ -11203,6 +11983,168 @@
   <p:cSld>
     <p:spTree>
       <p:nvGrpSpPr>
+        <p:cNvPr id="1" name="">
+          <a:extLst>
+            <a:ext uri="{FF2B5EF4-FFF2-40B4-BE49-F238E27FC236}">
+              <a16:creationId xmlns:a16="http://schemas.microsoft.com/office/drawing/2014/main" id="{E65220F6-DAF2-6E23-B603-B9293D04A6E5}"/>
+            </a:ext>
+          </a:extLst>
+        </p:cNvPr>
+        <p:cNvGrpSpPr/>
+        <p:nvPr/>
+      </p:nvGrpSpPr>
+      <p:grpSpPr>
+        <a:xfrm>
+          <a:off x="0" y="0"/>
+          <a:ext cx="0" cy="0"/>
+          <a:chOff x="0" y="0"/>
+          <a:chExt cx="0" cy="0"/>
+        </a:xfrm>
+      </p:grpSpPr>
+      <p:sp>
+        <p:nvSpPr>
+          <p:cNvPr id="3" name="TextBox 2">
+            <a:extLst>
+              <a:ext uri="{FF2B5EF4-FFF2-40B4-BE49-F238E27FC236}">
+                <a16:creationId xmlns:a16="http://schemas.microsoft.com/office/drawing/2014/main" id="{ADD26835-DAEE-DFA5-550D-947BE98CD584}"/>
+              </a:ext>
+            </a:extLst>
+          </p:cNvPr>
+          <p:cNvSpPr txBox="1"/>
+          <p:nvPr/>
+        </p:nvSpPr>
+        <p:spPr>
+          <a:xfrm>
+            <a:off x="6912049" y="188640"/>
+            <a:ext cx="3594831" cy="461665"/>
+          </a:xfrm>
+          <a:prstGeom prst="rect">
+            <a:avLst/>
+          </a:prstGeom>
+          <a:noFill/>
+        </p:spPr>
+        <p:txBody>
+          <a:bodyPr wrap="square" rtlCol="0">
+            <a:spAutoFit/>
+          </a:bodyPr>
+          <a:lstStyle/>
+          <a:p>
+            <a:pPr algn="ctr"/>
+            <a:r>
+              <a:rPr lang="en-IN" sz="2400" b="1" dirty="0">
+                <a:solidFill>
+                  <a:srgbClr val="D47D26"/>
+                </a:solidFill>
+                <a:latin typeface="Times New Roman" panose="02020603050405020304" pitchFamily="18" charset="0"/>
+                <a:cs typeface="Times New Roman" panose="02020603050405020304" pitchFamily="18" charset="0"/>
+              </a:rPr>
+              <a:t>IMPLEMENTATION</a:t>
+            </a:r>
+          </a:p>
+        </p:txBody>
+      </p:sp>
+      <p:pic>
+        <p:nvPicPr>
+          <p:cNvPr id="4" name="Picture 3" descr="A graph of an equation&#10;&#10;AI-generated content may be incorrect.">
+            <a:extLst>
+              <a:ext uri="{FF2B5EF4-FFF2-40B4-BE49-F238E27FC236}">
+                <a16:creationId xmlns:a16="http://schemas.microsoft.com/office/drawing/2014/main" id="{851D173B-DA75-7DCF-3BD3-B025A34CD356}"/>
+              </a:ext>
+            </a:extLst>
+          </p:cNvPr>
+          <p:cNvPicPr>
+            <a:picLocks noChangeAspect="1"/>
+          </p:cNvPicPr>
+          <p:nvPr/>
+        </p:nvPicPr>
+        <p:blipFill>
+          <a:blip r:embed="rId3">
+            <a:extLst>
+              <a:ext uri="{28A0092B-C50C-407E-A947-70E740481C1C}">
+                <a14:useLocalDpi xmlns:a14="http://schemas.microsoft.com/office/drawing/2010/main" val="0"/>
+              </a:ext>
+            </a:extLst>
+          </a:blip>
+          <a:stretch>
+            <a:fillRect/>
+          </a:stretch>
+        </p:blipFill>
+        <p:spPr>
+          <a:xfrm>
+            <a:off x="2375545" y="908720"/>
+            <a:ext cx="5134366" cy="5262382"/>
+          </a:xfrm>
+          <a:prstGeom prst="rect">
+            <a:avLst/>
+          </a:prstGeom>
+        </p:spPr>
+      </p:pic>
+      <p:sp>
+        <p:nvSpPr>
+          <p:cNvPr id="6" name="TextBox 5">
+            <a:extLst>
+              <a:ext uri="{FF2B5EF4-FFF2-40B4-BE49-F238E27FC236}">
+                <a16:creationId xmlns:a16="http://schemas.microsoft.com/office/drawing/2014/main" id="{A63F3F38-F7ED-293C-0F8E-FCE62862F5D4}"/>
+              </a:ext>
+            </a:extLst>
+          </p:cNvPr>
+          <p:cNvSpPr txBox="1"/>
+          <p:nvPr/>
+        </p:nvSpPr>
+        <p:spPr>
+          <a:xfrm>
+            <a:off x="3599681" y="6138378"/>
+            <a:ext cx="3095719" cy="369332"/>
+          </a:xfrm>
+          <a:prstGeom prst="rect">
+            <a:avLst/>
+          </a:prstGeom>
+          <a:noFill/>
+        </p:spPr>
+        <p:txBody>
+          <a:bodyPr wrap="none" rtlCol="0">
+            <a:spAutoFit/>
+          </a:bodyPr>
+          <a:lstStyle/>
+          <a:p>
+            <a:r>
+              <a:rPr lang="en-US" dirty="0"/>
+              <a:t>Cyclic representation of time</a:t>
+            </a:r>
+            <a:endParaRPr lang="en-IN" dirty="0"/>
+          </a:p>
+        </p:txBody>
+      </p:sp>
+    </p:spTree>
+    <p:extLst>
+      <p:ext uri="{BB962C8B-B14F-4D97-AF65-F5344CB8AC3E}">
+        <p14:creationId xmlns:p14="http://schemas.microsoft.com/office/powerpoint/2010/main" val="942771469"/>
+      </p:ext>
+    </p:extLst>
+  </p:cSld>
+  <p:clrMapOvr>
+    <a:masterClrMapping/>
+  </p:clrMapOvr>
+  <mc:AlternateContent xmlns:mc="http://schemas.openxmlformats.org/markup-compatibility/2006" xmlns:p14="http://schemas.microsoft.com/office/powerpoint/2010/main">
+    <mc:Choice Requires="p14">
+      <p:transition p14:dur="100">
+        <p:cut/>
+      </p:transition>
+    </mc:Choice>
+    <mc:Fallback xmlns="">
+      <p:transition>
+        <p:cut/>
+      </p:transition>
+    </mc:Fallback>
+  </mc:AlternateContent>
+</p:sld>
+</file>
+
+<file path=ppt/slides/slide21.xml><?xml version="1.0" encoding="utf-8"?>
+<p:sld xmlns:a="http://schemas.openxmlformats.org/drawingml/2006/main" xmlns:r="http://schemas.openxmlformats.org/officeDocument/2006/relationships" xmlns:p="http://schemas.openxmlformats.org/presentationml/2006/main">
+  <p:cSld>
+    <p:spTree>
+      <p:nvGrpSpPr>
         <p:cNvPr id="1" name=""/>
         <p:cNvGrpSpPr/>
         <p:nvPr/>
@@ -11412,7 +12354,7 @@
 </p:sld>
 </file>
 
-<file path=ppt/slides/slide21.xml><?xml version="1.0" encoding="utf-8"?>
+<file path=ppt/slides/slide22.xml><?xml version="1.0" encoding="utf-8"?>
 <p:sld xmlns:a="http://schemas.openxmlformats.org/drawingml/2006/main" xmlns:r="http://schemas.openxmlformats.org/officeDocument/2006/relationships" xmlns:p="http://schemas.openxmlformats.org/presentationml/2006/main">
   <p:cSld>
     <p:spTree>
@@ -11910,7 +12852,7 @@
 </p:sld>
 </file>
 
-<file path=ppt/slides/slide22.xml><?xml version="1.0" encoding="utf-8"?>
+<file path=ppt/slides/slide23.xml><?xml version="1.0" encoding="utf-8"?>
 <p:sld xmlns:a="http://schemas.openxmlformats.org/drawingml/2006/main" xmlns:r="http://schemas.openxmlformats.org/officeDocument/2006/relationships" xmlns:p="http://schemas.openxmlformats.org/presentationml/2006/main">
   <p:cSld>
     <p:spTree>
@@ -12130,7 +13072,7 @@
 </p:sld>
 </file>
 
-<file path=ppt/slides/slide23.xml><?xml version="1.0" encoding="utf-8"?>
+<file path=ppt/slides/slide24.xml><?xml version="1.0" encoding="utf-8"?>
 <p:sld xmlns:a="http://schemas.openxmlformats.org/drawingml/2006/main" xmlns:r="http://schemas.openxmlformats.org/officeDocument/2006/relationships" xmlns:p="http://schemas.openxmlformats.org/presentationml/2006/main">
   <p:cSld>
     <p:spTree>
@@ -12244,7 +13186,7 @@
 </p:sld>
 </file>
 
-<file path=ppt/slides/slide24.xml><?xml version="1.0" encoding="utf-8"?>
+<file path=ppt/slides/slide25.xml><?xml version="1.0" encoding="utf-8"?>
 <p:sld xmlns:a="http://schemas.openxmlformats.org/drawingml/2006/main" xmlns:r="http://schemas.openxmlformats.org/officeDocument/2006/relationships" xmlns:p="http://schemas.openxmlformats.org/presentationml/2006/main">
   <p:cSld>
     <p:spTree>
@@ -12980,7 +13922,7 @@
 </p:sld>
 </file>
 
-<file path=ppt/slides/slide25.xml><?xml version="1.0" encoding="utf-8"?>
+<file path=ppt/slides/slide26.xml><?xml version="1.0" encoding="utf-8"?>
 <p:sld xmlns:a="http://schemas.openxmlformats.org/drawingml/2006/main" xmlns:r="http://schemas.openxmlformats.org/officeDocument/2006/relationships" xmlns:p="http://schemas.openxmlformats.org/presentationml/2006/main">
   <p:cSld>
     <p:spTree>
@@ -13999,7 +14941,7 @@
 </p:sld>
 </file>
 
-<file path=ppt/slides/slide26.xml><?xml version="1.0" encoding="utf-8"?>
+<file path=ppt/slides/slide27.xml><?xml version="1.0" encoding="utf-8"?>
 <p:sld xmlns:a="http://schemas.openxmlformats.org/drawingml/2006/main" xmlns:r="http://schemas.openxmlformats.org/officeDocument/2006/relationships" xmlns:p="http://schemas.openxmlformats.org/presentationml/2006/main">
   <p:cSld>
     <p:spTree>
@@ -14462,7 +15404,7 @@
 </p:sld>
 </file>
 
-<file path=ppt/slides/slide27.xml><?xml version="1.0" encoding="utf-8"?>
+<file path=ppt/slides/slide28.xml><?xml version="1.0" encoding="utf-8"?>
 <p:sld xmlns:a="http://schemas.openxmlformats.org/drawingml/2006/main" xmlns:r="http://schemas.openxmlformats.org/officeDocument/2006/relationships" xmlns:p="http://schemas.openxmlformats.org/presentationml/2006/main">
   <p:cSld>
     <p:spTree>
@@ -14564,7 +15506,7 @@
             </a:r>
             <a:r>
               <a:rPr lang="en-US" dirty="0"/>
-              <a:t> = Number of positive samples / Number of negative samples</a:t>
+              <a:t> = Number of valid samples / Number of fraud samples</a:t>
             </a:r>
           </a:p>
           <a:p>
@@ -14686,13 +15628,13 @@
   <p:clrMapOvr>
     <a:masterClrMapping/>
   </p:clrMapOvr>
-  <mc:AlternateContent xmlns:mc="http://schemas.openxmlformats.org/markup-compatibility/2006">
-    <mc:Choice xmlns:p14="http://schemas.microsoft.com/office/powerpoint/2010/main" Requires="p14">
+  <mc:AlternateContent xmlns:mc="http://schemas.openxmlformats.org/markup-compatibility/2006" xmlns:p14="http://schemas.microsoft.com/office/powerpoint/2010/main">
+    <mc:Choice Requires="p14">
       <p:transition p14:dur="100">
         <p:cut/>
       </p:transition>
     </mc:Choice>
-    <mc:Fallback>
+    <mc:Fallback xmlns="">
       <p:transition>
         <p:cut/>
       </p:transition>
@@ -14701,7 +15643,7 @@
 </p:sld>
 </file>
 
-<file path=ppt/slides/slide28.xml><?xml version="1.0" encoding="utf-8"?>
+<file path=ppt/slides/slide29.xml><?xml version="1.0" encoding="utf-8"?>
 <p:sld xmlns:a="http://schemas.openxmlformats.org/drawingml/2006/main" xmlns:r="http://schemas.openxmlformats.org/officeDocument/2006/relationships" xmlns:p="http://schemas.openxmlformats.org/presentationml/2006/main">
   <p:cSld>
     <p:spTree>
@@ -14814,7 +15756,7 @@
         </p:nvSpPr>
         <p:spPr>
           <a:xfrm>
-            <a:off x="2940470" y="1700808"/>
+            <a:off x="2932232" y="1664804"/>
             <a:ext cx="762076" cy="792088"/>
           </a:xfrm>
           <a:prstGeom prst="rect">
@@ -14962,8 +15904,8 @@
         </p:nvSpPr>
         <p:spPr>
           <a:xfrm>
-            <a:off x="2927646" y="4869160"/>
-            <a:ext cx="762076" cy="576064"/>
+            <a:off x="2856982" y="4797152"/>
+            <a:ext cx="814707" cy="720080"/>
           </a:xfrm>
           <a:prstGeom prst="rect">
             <a:avLst/>
@@ -14997,8 +15939,15 @@
           <a:bodyPr rtlCol="0" anchor="ctr"/>
           <a:lstStyle/>
           <a:p>
-            <a:pPr algn="ctr"/>
-            <a:endParaRPr lang="en-IN"/>
+            <a:r>
+              <a:rPr lang="en-US" sz="1100" dirty="0" err="1"/>
+              <a:t>Dataset+error</a:t>
+            </a:r>
+            <a:r>
+              <a:rPr lang="en-US" sz="1100" dirty="0"/>
+              <a:t> correction</a:t>
+            </a:r>
+            <a:endParaRPr lang="en-IN" sz="1100" dirty="0"/>
           </a:p>
         </p:txBody>
       </p:sp>
@@ -15038,6 +15987,68 @@
           </a:p>
         </p:txBody>
       </p:sp>
+      <p:sp>
+        <p:nvSpPr>
+          <p:cNvPr id="3" name="Rectangle 2">
+            <a:extLst>
+              <a:ext uri="{FF2B5EF4-FFF2-40B4-BE49-F238E27FC236}">
+                <a16:creationId xmlns:a16="http://schemas.microsoft.com/office/drawing/2014/main" id="{9B6F5E84-17ED-A529-6EEC-E56D2EE0A035}"/>
+              </a:ext>
+            </a:extLst>
+          </p:cNvPr>
+          <p:cNvSpPr/>
+          <p:nvPr/>
+        </p:nvSpPr>
+        <p:spPr>
+          <a:xfrm>
+            <a:off x="2879601" y="3068960"/>
+            <a:ext cx="814707" cy="792088"/>
+          </a:xfrm>
+          <a:prstGeom prst="rect">
+            <a:avLst/>
+          </a:prstGeom>
+          <a:solidFill>
+            <a:srgbClr val="FB0000"/>
+          </a:solidFill>
+          <a:ln>
+            <a:solidFill>
+              <a:srgbClr val="FB0000"/>
+            </a:solidFill>
+          </a:ln>
+        </p:spPr>
+        <p:style>
+          <a:lnRef idx="2">
+            <a:schemeClr val="accent1">
+              <a:shade val="15000"/>
+            </a:schemeClr>
+          </a:lnRef>
+          <a:fillRef idx="1">
+            <a:schemeClr val="accent1"/>
+          </a:fillRef>
+          <a:effectRef idx="0">
+            <a:schemeClr val="accent1"/>
+          </a:effectRef>
+          <a:fontRef idx="minor">
+            <a:schemeClr val="lt1"/>
+          </a:fontRef>
+        </p:style>
+        <p:txBody>
+          <a:bodyPr rtlCol="0" anchor="ctr"/>
+          <a:lstStyle/>
+          <a:p>
+            <a:pPr algn="ctr"/>
+            <a:r>
+              <a:rPr lang="en-US" sz="1100" dirty="0" err="1"/>
+              <a:t>Dataset+error</a:t>
+            </a:r>
+            <a:r>
+              <a:rPr lang="en-US" sz="1100" dirty="0"/>
+              <a:t> correction</a:t>
+            </a:r>
+            <a:endParaRPr lang="en-IN" sz="1100" dirty="0"/>
+          </a:p>
+        </p:txBody>
+      </p:sp>
     </p:spTree>
     <p:extLst>
       <p:ext uri="{BB962C8B-B14F-4D97-AF65-F5344CB8AC3E}">
@@ -15063,7 +16074,319 @@
 </p:sld>
 </file>
 
-<file path=ppt/slides/slide29.xml><?xml version="1.0" encoding="utf-8"?>
+<file path=ppt/slides/slide3.xml><?xml version="1.0" encoding="utf-8"?>
+<p:sld xmlns:a="http://schemas.openxmlformats.org/drawingml/2006/main" xmlns:r="http://schemas.openxmlformats.org/officeDocument/2006/relationships" xmlns:p="http://schemas.openxmlformats.org/presentationml/2006/main">
+  <p:cSld>
+    <p:spTree>
+      <p:nvGrpSpPr>
+        <p:cNvPr id="1" name=""/>
+        <p:cNvGrpSpPr/>
+        <p:nvPr/>
+      </p:nvGrpSpPr>
+      <p:grpSpPr>
+        <a:xfrm>
+          <a:off x="0" y="0"/>
+          <a:ext cx="0" cy="0"/>
+          <a:chOff x="0" y="0"/>
+          <a:chExt cx="0" cy="0"/>
+        </a:xfrm>
+      </p:grpSpPr>
+      <p:sp>
+        <p:nvSpPr>
+          <p:cNvPr id="2" name="TextBox 1"/>
+          <p:cNvSpPr txBox="1"/>
+          <p:nvPr/>
+        </p:nvSpPr>
+        <p:spPr>
+          <a:xfrm>
+            <a:off x="7560121" y="188640"/>
+            <a:ext cx="2743200" cy="461665"/>
+          </a:xfrm>
+          <a:prstGeom prst="rect">
+            <a:avLst/>
+          </a:prstGeom>
+        </p:spPr>
+        <p:txBody>
+          <a:bodyPr rot="0" spcFirstLastPara="0" vertOverflow="overflow" horzOverflow="overflow" vert="horz" wrap="square" lIns="91440" tIns="45720" rIns="91440" bIns="45720" numCol="1" spcCol="0" rtlCol="0" fromWordArt="0" anchor="t" anchorCtr="0" forceAA="0" compatLnSpc="1">
+            <a:prstTxWarp prst="textNoShape">
+              <a:avLst/>
+            </a:prstTxWarp>
+            <a:spAutoFit/>
+          </a:bodyPr>
+          <a:lstStyle/>
+          <a:p>
+            <a:pPr algn="ctr"/>
+            <a:r>
+              <a:rPr lang="en-US" sz="2400" b="1" dirty="0">
+                <a:solidFill>
+                  <a:srgbClr val="D47D26"/>
+                </a:solidFill>
+                <a:latin typeface="Times New Roman" panose="02020603050405020304" pitchFamily="18" charset="0"/>
+                <a:cs typeface="Times New Roman" panose="02020603050405020304" pitchFamily="18" charset="0"/>
+              </a:rPr>
+              <a:t>INTRODUCTION</a:t>
+            </a:r>
+          </a:p>
+        </p:txBody>
+      </p:sp>
+      <p:sp>
+        <p:nvSpPr>
+          <p:cNvPr id="9" name="TextBox 8">
+            <a:extLst>
+              <a:ext uri="{FF2B5EF4-FFF2-40B4-BE49-F238E27FC236}">
+                <a16:creationId xmlns:a16="http://schemas.microsoft.com/office/drawing/2014/main" id="{EE187B90-23F6-4416-A139-0D1D53F1CBCB}"/>
+              </a:ext>
+            </a:extLst>
+          </p:cNvPr>
+          <p:cNvSpPr txBox="1"/>
+          <p:nvPr/>
+        </p:nvSpPr>
+        <p:spPr>
+          <a:xfrm>
+            <a:off x="791369" y="980728"/>
+            <a:ext cx="9433048" cy="5115311"/>
+          </a:xfrm>
+          <a:prstGeom prst="rect">
+            <a:avLst/>
+          </a:prstGeom>
+          <a:noFill/>
+        </p:spPr>
+        <p:txBody>
+          <a:bodyPr wrap="square" rtlCol="0" anchor="t">
+            <a:spAutoFit/>
+          </a:bodyPr>
+          <a:lstStyle/>
+          <a:p>
+            <a:pPr marL="342900" indent="-342900">
+              <a:lnSpc>
+                <a:spcPct val="150000"/>
+              </a:lnSpc>
+              <a:buFont typeface="Arial" panose="020B0604020202020204" pitchFamily="34" charset="0"/>
+              <a:buChar char="•"/>
+            </a:pPr>
+            <a:r>
+              <a:rPr lang="en-US" sz="2000" dirty="0">
+                <a:latin typeface="Times New Roman" panose="02020603050405020304" pitchFamily="18" charset="0"/>
+                <a:cs typeface="Times New Roman" panose="02020603050405020304" pitchFamily="18" charset="0"/>
+              </a:rPr>
+              <a:t>Rapid </a:t>
+            </a:r>
+            <a:r>
+              <a:rPr lang="en-US" sz="2000" dirty="0" err="1">
+                <a:latin typeface="Times New Roman" panose="02020603050405020304" pitchFamily="18" charset="0"/>
+                <a:cs typeface="Times New Roman" panose="02020603050405020304" pitchFamily="18" charset="0"/>
+              </a:rPr>
+              <a:t>digitalisation</a:t>
+            </a:r>
+            <a:r>
+              <a:rPr lang="en-US" sz="2000" dirty="0">
+                <a:latin typeface="Times New Roman" panose="02020603050405020304" pitchFamily="18" charset="0"/>
+                <a:cs typeface="Times New Roman" panose="02020603050405020304" pitchFamily="18" charset="0"/>
+              </a:rPr>
+              <a:t> has increased online transactions.</a:t>
+            </a:r>
+          </a:p>
+          <a:p>
+            <a:pPr marL="342900" indent="-342900">
+              <a:lnSpc>
+                <a:spcPct val="150000"/>
+              </a:lnSpc>
+              <a:buFont typeface="Arial" panose="020B0604020202020204" pitchFamily="34" charset="0"/>
+              <a:buChar char="•"/>
+            </a:pPr>
+            <a:r>
+              <a:rPr lang="en-US" sz="2000" dirty="0">
+                <a:latin typeface="Times New Roman" panose="02020603050405020304" pitchFamily="18" charset="0"/>
+                <a:cs typeface="Times New Roman" panose="02020603050405020304" pitchFamily="18" charset="0"/>
+              </a:rPr>
+              <a:t>With this growth, financial fraud has become a major concern.</a:t>
+            </a:r>
+          </a:p>
+          <a:p>
+            <a:pPr marL="342900" indent="-342900">
+              <a:lnSpc>
+                <a:spcPct val="150000"/>
+              </a:lnSpc>
+              <a:buFont typeface="Arial" panose="020B0604020202020204" pitchFamily="34" charset="0"/>
+              <a:buChar char="•"/>
+            </a:pPr>
+            <a:r>
+              <a:rPr lang="en-US" sz="2000" dirty="0">
+                <a:latin typeface="Times New Roman" panose="02020603050405020304" pitchFamily="18" charset="0"/>
+                <a:cs typeface="Times New Roman" panose="02020603050405020304" pitchFamily="18" charset="0"/>
+              </a:rPr>
+              <a:t>Fraud detection ensures security, trust, and the prevention of financial loss.</a:t>
+            </a:r>
+          </a:p>
+          <a:p>
+            <a:pPr marL="342900" indent="-342900">
+              <a:lnSpc>
+                <a:spcPct val="150000"/>
+              </a:lnSpc>
+              <a:buFont typeface="Arial" panose="020B0604020202020204" pitchFamily="34" charset="0"/>
+              <a:buChar char="•"/>
+            </a:pPr>
+            <a:r>
+              <a:rPr lang="en-US" sz="2000" dirty="0">
+                <a:latin typeface="Times New Roman" panose="02020603050405020304" pitchFamily="18" charset="0"/>
+                <a:cs typeface="Times New Roman" panose="02020603050405020304" pitchFamily="18" charset="0"/>
+              </a:rPr>
+              <a:t>Machine Learning helps detect suspicious patterns automatically and efficiently.</a:t>
+            </a:r>
+          </a:p>
+          <a:p>
+            <a:pPr>
+              <a:lnSpc>
+                <a:spcPct val="150000"/>
+              </a:lnSpc>
+            </a:pPr>
+            <a:endParaRPr lang="en-US" sz="2000" dirty="0">
+              <a:latin typeface="Times New Roman" panose="02020603050405020304" pitchFamily="18" charset="0"/>
+              <a:cs typeface="Times New Roman" panose="02020603050405020304" pitchFamily="18" charset="0"/>
+            </a:endParaRPr>
+          </a:p>
+          <a:p>
+            <a:pPr marL="342900" indent="-342900">
+              <a:lnSpc>
+                <a:spcPct val="150000"/>
+              </a:lnSpc>
+              <a:buFont typeface="Arial" panose="020B0604020202020204" pitchFamily="34" charset="0"/>
+              <a:buChar char="•"/>
+            </a:pPr>
+            <a:endParaRPr lang="en-US" sz="2000" dirty="0">
+              <a:latin typeface="Times New Roman" panose="02020603050405020304" pitchFamily="18" charset="0"/>
+              <a:cs typeface="Times New Roman" panose="02020603050405020304" pitchFamily="18" charset="0"/>
+            </a:endParaRPr>
+          </a:p>
+          <a:p>
+            <a:pPr marL="342900" indent="-342900">
+              <a:lnSpc>
+                <a:spcPct val="150000"/>
+              </a:lnSpc>
+              <a:buFont typeface="Arial" panose="020B0604020202020204" pitchFamily="34" charset="0"/>
+              <a:buChar char="•"/>
+            </a:pPr>
+            <a:endParaRPr lang="en-US" sz="2000" dirty="0">
+              <a:latin typeface="Times New Roman" panose="02020603050405020304" pitchFamily="18" charset="0"/>
+              <a:cs typeface="Times New Roman" panose="02020603050405020304" pitchFamily="18" charset="0"/>
+            </a:endParaRPr>
+          </a:p>
+          <a:p>
+            <a:pPr marL="342900" indent="-342900">
+              <a:lnSpc>
+                <a:spcPct val="150000"/>
+              </a:lnSpc>
+              <a:buFont typeface="Arial" panose="020B0604020202020204" pitchFamily="34" charset="0"/>
+              <a:buChar char="•"/>
+            </a:pPr>
+            <a:endParaRPr lang="en-US" sz="2000" dirty="0">
+              <a:latin typeface="Times New Roman" panose="02020603050405020304" pitchFamily="18" charset="0"/>
+              <a:cs typeface="Times New Roman" panose="02020603050405020304" pitchFamily="18" charset="0"/>
+            </a:endParaRPr>
+          </a:p>
+          <a:p>
+            <a:pPr marL="342900" indent="-342900">
+              <a:lnSpc>
+                <a:spcPct val="150000"/>
+              </a:lnSpc>
+              <a:buFont typeface="Arial" panose="020B0604020202020204" pitchFamily="34" charset="0"/>
+              <a:buChar char="•"/>
+            </a:pPr>
+            <a:endParaRPr lang="en-US" sz="2000" dirty="0">
+              <a:latin typeface="Times New Roman" panose="02020603050405020304" pitchFamily="18" charset="0"/>
+              <a:cs typeface="Times New Roman" panose="02020603050405020304" pitchFamily="18" charset="0"/>
+            </a:endParaRPr>
+          </a:p>
+          <a:p>
+            <a:pPr marL="342900" indent="-342900">
+              <a:lnSpc>
+                <a:spcPct val="150000"/>
+              </a:lnSpc>
+              <a:buFont typeface="Arial" panose="020B0604020202020204" pitchFamily="34" charset="0"/>
+              <a:buChar char="•"/>
+            </a:pPr>
+            <a:endParaRPr lang="en-US" sz="2000" dirty="0">
+              <a:latin typeface="Times New Roman" panose="02020603050405020304" pitchFamily="18" charset="0"/>
+              <a:cs typeface="Times New Roman" panose="02020603050405020304" pitchFamily="18" charset="0"/>
+            </a:endParaRPr>
+          </a:p>
+          <a:p>
+            <a:pPr marL="342900" indent="-342900">
+              <a:lnSpc>
+                <a:spcPct val="150000"/>
+              </a:lnSpc>
+              <a:buFont typeface="Arial" panose="020B0604020202020204" pitchFamily="34" charset="0"/>
+              <a:buChar char="•"/>
+            </a:pPr>
+            <a:endParaRPr lang="en-US" sz="2000" dirty="0">
+              <a:latin typeface="Times New Roman" panose="02020603050405020304" pitchFamily="18" charset="0"/>
+              <a:cs typeface="Times New Roman" panose="02020603050405020304" pitchFamily="18" charset="0"/>
+            </a:endParaRPr>
+          </a:p>
+        </p:txBody>
+      </p:sp>
+      <p:pic>
+        <p:nvPicPr>
+          <p:cNvPr id="5" name="Picture 4">
+            <a:extLst>
+              <a:ext uri="{FF2B5EF4-FFF2-40B4-BE49-F238E27FC236}">
+                <a16:creationId xmlns:a16="http://schemas.microsoft.com/office/drawing/2014/main" id="{31639E72-6107-6F76-8FE9-62E17A60C0EB}"/>
+              </a:ext>
+            </a:extLst>
+          </p:cNvPr>
+          <p:cNvPicPr>
+            <a:picLocks noChangeAspect="1"/>
+          </p:cNvPicPr>
+          <p:nvPr/>
+        </p:nvPicPr>
+        <p:blipFill>
+          <a:blip r:embed="rId2" cstate="print">
+            <a:extLst>
+              <a:ext uri="{28A0092B-C50C-407E-A947-70E740481C1C}">
+                <a14:useLocalDpi xmlns:a14="http://schemas.microsoft.com/office/drawing/2010/main" val="0"/>
+              </a:ext>
+            </a:extLst>
+          </a:blip>
+          <a:stretch>
+            <a:fillRect/>
+          </a:stretch>
+        </p:blipFill>
+        <p:spPr>
+          <a:xfrm>
+            <a:off x="2447553" y="3068960"/>
+            <a:ext cx="4618031" cy="3141478"/>
+          </a:xfrm>
+          <a:prstGeom prst="rect">
+            <a:avLst/>
+          </a:prstGeom>
+        </p:spPr>
+      </p:pic>
+    </p:spTree>
+    <p:extLst>
+      <p:ext uri="{BB962C8B-B14F-4D97-AF65-F5344CB8AC3E}">
+        <p14:creationId xmlns:p14="http://schemas.microsoft.com/office/powerpoint/2010/main" val="3954245881"/>
+      </p:ext>
+    </p:extLst>
+  </p:cSld>
+  <p:clrMapOvr>
+    <a:masterClrMapping/>
+  </p:clrMapOvr>
+  <mc:AlternateContent xmlns:mc="http://schemas.openxmlformats.org/markup-compatibility/2006" xmlns:p14="http://schemas.microsoft.com/office/powerpoint/2010/main">
+    <mc:Choice Requires="p14">
+      <p:transition p14:dur="100">
+        <p:cut/>
+      </p:transition>
+    </mc:Choice>
+    <mc:Fallback xmlns="">
+      <p:transition>
+        <p:cut/>
+      </p:transition>
+    </mc:Fallback>
+  </mc:AlternateContent>
+</p:sld>
+</file>
+
+<file path=ppt/slides/slide30.xml><?xml version="1.0" encoding="utf-8"?>
 <p:sld xmlns:a="http://schemas.openxmlformats.org/drawingml/2006/main" xmlns:r="http://schemas.openxmlformats.org/officeDocument/2006/relationships" xmlns:p="http://schemas.openxmlformats.org/presentationml/2006/main">
   <p:cSld>
     <p:spTree>
@@ -15615,319 +16938,7 @@
 </p:sld>
 </file>
 
-<file path=ppt/slides/slide3.xml><?xml version="1.0" encoding="utf-8"?>
-<p:sld xmlns:a="http://schemas.openxmlformats.org/drawingml/2006/main" xmlns:r="http://schemas.openxmlformats.org/officeDocument/2006/relationships" xmlns:p="http://schemas.openxmlformats.org/presentationml/2006/main">
-  <p:cSld>
-    <p:spTree>
-      <p:nvGrpSpPr>
-        <p:cNvPr id="1" name=""/>
-        <p:cNvGrpSpPr/>
-        <p:nvPr/>
-      </p:nvGrpSpPr>
-      <p:grpSpPr>
-        <a:xfrm>
-          <a:off x="0" y="0"/>
-          <a:ext cx="0" cy="0"/>
-          <a:chOff x="0" y="0"/>
-          <a:chExt cx="0" cy="0"/>
-        </a:xfrm>
-      </p:grpSpPr>
-      <p:sp>
-        <p:nvSpPr>
-          <p:cNvPr id="2" name="TextBox 1"/>
-          <p:cNvSpPr txBox="1"/>
-          <p:nvPr/>
-        </p:nvSpPr>
-        <p:spPr>
-          <a:xfrm>
-            <a:off x="7560121" y="188640"/>
-            <a:ext cx="2743200" cy="461665"/>
-          </a:xfrm>
-          <a:prstGeom prst="rect">
-            <a:avLst/>
-          </a:prstGeom>
-        </p:spPr>
-        <p:txBody>
-          <a:bodyPr rot="0" spcFirstLastPara="0" vertOverflow="overflow" horzOverflow="overflow" vert="horz" wrap="square" lIns="91440" tIns="45720" rIns="91440" bIns="45720" numCol="1" spcCol="0" rtlCol="0" fromWordArt="0" anchor="t" anchorCtr="0" forceAA="0" compatLnSpc="1">
-            <a:prstTxWarp prst="textNoShape">
-              <a:avLst/>
-            </a:prstTxWarp>
-            <a:spAutoFit/>
-          </a:bodyPr>
-          <a:lstStyle/>
-          <a:p>
-            <a:pPr algn="ctr"/>
-            <a:r>
-              <a:rPr lang="en-US" sz="2400" b="1" dirty="0">
-                <a:solidFill>
-                  <a:srgbClr val="D47D26"/>
-                </a:solidFill>
-                <a:latin typeface="Times New Roman" panose="02020603050405020304" pitchFamily="18" charset="0"/>
-                <a:cs typeface="Times New Roman" panose="02020603050405020304" pitchFamily="18" charset="0"/>
-              </a:rPr>
-              <a:t>INTRODUCTION</a:t>
-            </a:r>
-          </a:p>
-        </p:txBody>
-      </p:sp>
-      <p:sp>
-        <p:nvSpPr>
-          <p:cNvPr id="9" name="TextBox 8">
-            <a:extLst>
-              <a:ext uri="{FF2B5EF4-FFF2-40B4-BE49-F238E27FC236}">
-                <a16:creationId xmlns:a16="http://schemas.microsoft.com/office/drawing/2014/main" id="{EE187B90-23F6-4416-A139-0D1D53F1CBCB}"/>
-              </a:ext>
-            </a:extLst>
-          </p:cNvPr>
-          <p:cNvSpPr txBox="1"/>
-          <p:nvPr/>
-        </p:nvSpPr>
-        <p:spPr>
-          <a:xfrm>
-            <a:off x="791369" y="980728"/>
-            <a:ext cx="9433048" cy="5115311"/>
-          </a:xfrm>
-          <a:prstGeom prst="rect">
-            <a:avLst/>
-          </a:prstGeom>
-          <a:noFill/>
-        </p:spPr>
-        <p:txBody>
-          <a:bodyPr wrap="square" rtlCol="0" anchor="t">
-            <a:spAutoFit/>
-          </a:bodyPr>
-          <a:lstStyle/>
-          <a:p>
-            <a:pPr marL="342900" indent="-342900">
-              <a:lnSpc>
-                <a:spcPct val="150000"/>
-              </a:lnSpc>
-              <a:buFont typeface="Arial" panose="020B0604020202020204" pitchFamily="34" charset="0"/>
-              <a:buChar char="•"/>
-            </a:pPr>
-            <a:r>
-              <a:rPr lang="en-US" sz="2000" dirty="0">
-                <a:latin typeface="Times New Roman" panose="02020603050405020304" pitchFamily="18" charset="0"/>
-                <a:cs typeface="Times New Roman" panose="02020603050405020304" pitchFamily="18" charset="0"/>
-              </a:rPr>
-              <a:t>Rapid </a:t>
-            </a:r>
-            <a:r>
-              <a:rPr lang="en-US" sz="2000" dirty="0" err="1">
-                <a:latin typeface="Times New Roman" panose="02020603050405020304" pitchFamily="18" charset="0"/>
-                <a:cs typeface="Times New Roman" panose="02020603050405020304" pitchFamily="18" charset="0"/>
-              </a:rPr>
-              <a:t>digitalisation</a:t>
-            </a:r>
-            <a:r>
-              <a:rPr lang="en-US" sz="2000" dirty="0">
-                <a:latin typeface="Times New Roman" panose="02020603050405020304" pitchFamily="18" charset="0"/>
-                <a:cs typeface="Times New Roman" panose="02020603050405020304" pitchFamily="18" charset="0"/>
-              </a:rPr>
-              <a:t> has increased online transactions.</a:t>
-            </a:r>
-          </a:p>
-          <a:p>
-            <a:pPr marL="342900" indent="-342900">
-              <a:lnSpc>
-                <a:spcPct val="150000"/>
-              </a:lnSpc>
-              <a:buFont typeface="Arial" panose="020B0604020202020204" pitchFamily="34" charset="0"/>
-              <a:buChar char="•"/>
-            </a:pPr>
-            <a:r>
-              <a:rPr lang="en-US" sz="2000" dirty="0">
-                <a:latin typeface="Times New Roman" panose="02020603050405020304" pitchFamily="18" charset="0"/>
-                <a:cs typeface="Times New Roman" panose="02020603050405020304" pitchFamily="18" charset="0"/>
-              </a:rPr>
-              <a:t>With this growth, financial fraud has become a major concern.</a:t>
-            </a:r>
-          </a:p>
-          <a:p>
-            <a:pPr marL="342900" indent="-342900">
-              <a:lnSpc>
-                <a:spcPct val="150000"/>
-              </a:lnSpc>
-              <a:buFont typeface="Arial" panose="020B0604020202020204" pitchFamily="34" charset="0"/>
-              <a:buChar char="•"/>
-            </a:pPr>
-            <a:r>
-              <a:rPr lang="en-US" sz="2000" dirty="0">
-                <a:latin typeface="Times New Roman" panose="02020603050405020304" pitchFamily="18" charset="0"/>
-                <a:cs typeface="Times New Roman" panose="02020603050405020304" pitchFamily="18" charset="0"/>
-              </a:rPr>
-              <a:t>Fraud detection ensures security, trust, and the prevention of financial loss.</a:t>
-            </a:r>
-          </a:p>
-          <a:p>
-            <a:pPr marL="342900" indent="-342900">
-              <a:lnSpc>
-                <a:spcPct val="150000"/>
-              </a:lnSpc>
-              <a:buFont typeface="Arial" panose="020B0604020202020204" pitchFamily="34" charset="0"/>
-              <a:buChar char="•"/>
-            </a:pPr>
-            <a:r>
-              <a:rPr lang="en-US" sz="2000" dirty="0">
-                <a:latin typeface="Times New Roman" panose="02020603050405020304" pitchFamily="18" charset="0"/>
-                <a:cs typeface="Times New Roman" panose="02020603050405020304" pitchFamily="18" charset="0"/>
-              </a:rPr>
-              <a:t>Machine Learning helps detect suspicious patterns automatically and efficiently.</a:t>
-            </a:r>
-          </a:p>
-          <a:p>
-            <a:pPr>
-              <a:lnSpc>
-                <a:spcPct val="150000"/>
-              </a:lnSpc>
-            </a:pPr>
-            <a:endParaRPr lang="en-US" sz="2000" dirty="0">
-              <a:latin typeface="Times New Roman" panose="02020603050405020304" pitchFamily="18" charset="0"/>
-              <a:cs typeface="Times New Roman" panose="02020603050405020304" pitchFamily="18" charset="0"/>
-            </a:endParaRPr>
-          </a:p>
-          <a:p>
-            <a:pPr marL="342900" indent="-342900">
-              <a:lnSpc>
-                <a:spcPct val="150000"/>
-              </a:lnSpc>
-              <a:buFont typeface="Arial" panose="020B0604020202020204" pitchFamily="34" charset="0"/>
-              <a:buChar char="•"/>
-            </a:pPr>
-            <a:endParaRPr lang="en-US" sz="2000" dirty="0">
-              <a:latin typeface="Times New Roman" panose="02020603050405020304" pitchFamily="18" charset="0"/>
-              <a:cs typeface="Times New Roman" panose="02020603050405020304" pitchFamily="18" charset="0"/>
-            </a:endParaRPr>
-          </a:p>
-          <a:p>
-            <a:pPr marL="342900" indent="-342900">
-              <a:lnSpc>
-                <a:spcPct val="150000"/>
-              </a:lnSpc>
-              <a:buFont typeface="Arial" panose="020B0604020202020204" pitchFamily="34" charset="0"/>
-              <a:buChar char="•"/>
-            </a:pPr>
-            <a:endParaRPr lang="en-US" sz="2000" dirty="0">
-              <a:latin typeface="Times New Roman" panose="02020603050405020304" pitchFamily="18" charset="0"/>
-              <a:cs typeface="Times New Roman" panose="02020603050405020304" pitchFamily="18" charset="0"/>
-            </a:endParaRPr>
-          </a:p>
-          <a:p>
-            <a:pPr marL="342900" indent="-342900">
-              <a:lnSpc>
-                <a:spcPct val="150000"/>
-              </a:lnSpc>
-              <a:buFont typeface="Arial" panose="020B0604020202020204" pitchFamily="34" charset="0"/>
-              <a:buChar char="•"/>
-            </a:pPr>
-            <a:endParaRPr lang="en-US" sz="2000" dirty="0">
-              <a:latin typeface="Times New Roman" panose="02020603050405020304" pitchFamily="18" charset="0"/>
-              <a:cs typeface="Times New Roman" panose="02020603050405020304" pitchFamily="18" charset="0"/>
-            </a:endParaRPr>
-          </a:p>
-          <a:p>
-            <a:pPr marL="342900" indent="-342900">
-              <a:lnSpc>
-                <a:spcPct val="150000"/>
-              </a:lnSpc>
-              <a:buFont typeface="Arial" panose="020B0604020202020204" pitchFamily="34" charset="0"/>
-              <a:buChar char="•"/>
-            </a:pPr>
-            <a:endParaRPr lang="en-US" sz="2000" dirty="0">
-              <a:latin typeface="Times New Roman" panose="02020603050405020304" pitchFamily="18" charset="0"/>
-              <a:cs typeface="Times New Roman" panose="02020603050405020304" pitchFamily="18" charset="0"/>
-            </a:endParaRPr>
-          </a:p>
-          <a:p>
-            <a:pPr marL="342900" indent="-342900">
-              <a:lnSpc>
-                <a:spcPct val="150000"/>
-              </a:lnSpc>
-              <a:buFont typeface="Arial" panose="020B0604020202020204" pitchFamily="34" charset="0"/>
-              <a:buChar char="•"/>
-            </a:pPr>
-            <a:endParaRPr lang="en-US" sz="2000" dirty="0">
-              <a:latin typeface="Times New Roman" panose="02020603050405020304" pitchFamily="18" charset="0"/>
-              <a:cs typeface="Times New Roman" panose="02020603050405020304" pitchFamily="18" charset="0"/>
-            </a:endParaRPr>
-          </a:p>
-          <a:p>
-            <a:pPr marL="342900" indent="-342900">
-              <a:lnSpc>
-                <a:spcPct val="150000"/>
-              </a:lnSpc>
-              <a:buFont typeface="Arial" panose="020B0604020202020204" pitchFamily="34" charset="0"/>
-              <a:buChar char="•"/>
-            </a:pPr>
-            <a:endParaRPr lang="en-US" sz="2000" dirty="0">
-              <a:latin typeface="Times New Roman" panose="02020603050405020304" pitchFamily="18" charset="0"/>
-              <a:cs typeface="Times New Roman" panose="02020603050405020304" pitchFamily="18" charset="0"/>
-            </a:endParaRPr>
-          </a:p>
-        </p:txBody>
-      </p:sp>
-      <p:pic>
-        <p:nvPicPr>
-          <p:cNvPr id="5" name="Picture 4">
-            <a:extLst>
-              <a:ext uri="{FF2B5EF4-FFF2-40B4-BE49-F238E27FC236}">
-                <a16:creationId xmlns:a16="http://schemas.microsoft.com/office/drawing/2014/main" id="{31639E72-6107-6F76-8FE9-62E17A60C0EB}"/>
-              </a:ext>
-            </a:extLst>
-          </p:cNvPr>
-          <p:cNvPicPr>
-            <a:picLocks noChangeAspect="1"/>
-          </p:cNvPicPr>
-          <p:nvPr/>
-        </p:nvPicPr>
-        <p:blipFill>
-          <a:blip r:embed="rId2" cstate="print">
-            <a:extLst>
-              <a:ext uri="{28A0092B-C50C-407E-A947-70E740481C1C}">
-                <a14:useLocalDpi xmlns:a14="http://schemas.microsoft.com/office/drawing/2010/main" val="0"/>
-              </a:ext>
-            </a:extLst>
-          </a:blip>
-          <a:stretch>
-            <a:fillRect/>
-          </a:stretch>
-        </p:blipFill>
-        <p:spPr>
-          <a:xfrm>
-            <a:off x="2447553" y="3068960"/>
-            <a:ext cx="4618031" cy="3141478"/>
-          </a:xfrm>
-          <a:prstGeom prst="rect">
-            <a:avLst/>
-          </a:prstGeom>
-        </p:spPr>
-      </p:pic>
-    </p:spTree>
-    <p:extLst>
-      <p:ext uri="{BB962C8B-B14F-4D97-AF65-F5344CB8AC3E}">
-        <p14:creationId xmlns:p14="http://schemas.microsoft.com/office/powerpoint/2010/main" val="3954245881"/>
-      </p:ext>
-    </p:extLst>
-  </p:cSld>
-  <p:clrMapOvr>
-    <a:masterClrMapping/>
-  </p:clrMapOvr>
-  <mc:AlternateContent xmlns:mc="http://schemas.openxmlformats.org/markup-compatibility/2006" xmlns:p14="http://schemas.microsoft.com/office/powerpoint/2010/main">
-    <mc:Choice Requires="p14">
-      <p:transition p14:dur="100">
-        <p:cut/>
-      </p:transition>
-    </mc:Choice>
-    <mc:Fallback xmlns="">
-      <p:transition>
-        <p:cut/>
-      </p:transition>
-    </mc:Fallback>
-  </mc:AlternateContent>
-</p:sld>
-</file>
-
-<file path=ppt/slides/slide30.xml><?xml version="1.0" encoding="utf-8"?>
+<file path=ppt/slides/slide31.xml><?xml version="1.0" encoding="utf-8"?>
 <p:sld xmlns:a="http://schemas.openxmlformats.org/drawingml/2006/main" xmlns:r="http://schemas.openxmlformats.org/officeDocument/2006/relationships" xmlns:p="http://schemas.openxmlformats.org/presentationml/2006/main">
   <p:cSld>
     <p:spTree>
@@ -16120,7 +17131,7 @@
 </p:sld>
 </file>
 
-<file path=ppt/slides/slide31.xml><?xml version="1.0" encoding="utf-8"?>
+<file path=ppt/slides/slide32.xml><?xml version="1.0" encoding="utf-8"?>
 <p:sld xmlns:a="http://schemas.openxmlformats.org/drawingml/2006/main" xmlns:r="http://schemas.openxmlformats.org/officeDocument/2006/relationships" xmlns:p="http://schemas.openxmlformats.org/presentationml/2006/main">
   <p:cSld>
     <p:spTree>
@@ -16249,13 +17260,13 @@
   <p:clrMapOvr>
     <a:masterClrMapping/>
   </p:clrMapOvr>
-  <mc:AlternateContent xmlns:mc="http://schemas.openxmlformats.org/markup-compatibility/2006">
-    <mc:Choice xmlns:p14="http://schemas.microsoft.com/office/powerpoint/2010/main" Requires="p14">
+  <mc:AlternateContent xmlns:mc="http://schemas.openxmlformats.org/markup-compatibility/2006" xmlns:p14="http://schemas.microsoft.com/office/powerpoint/2010/main">
+    <mc:Choice Requires="p14">
       <p:transition p14:dur="100">
         <p:cut/>
       </p:transition>
     </mc:Choice>
-    <mc:Fallback>
+    <mc:Fallback xmlns="">
       <p:transition>
         <p:cut/>
       </p:transition>
@@ -16264,7 +17275,7 @@
 </p:sld>
 </file>
 
-<file path=ppt/slides/slide32.xml><?xml version="1.0" encoding="utf-8"?>
+<file path=ppt/slides/slide33.xml><?xml version="1.0" encoding="utf-8"?>
 <p:sld xmlns:a="http://schemas.openxmlformats.org/drawingml/2006/main" xmlns:r="http://schemas.openxmlformats.org/officeDocument/2006/relationships" xmlns:p="http://schemas.openxmlformats.org/presentationml/2006/main">
   <p:cSld>
     <p:spTree>
@@ -16455,13 +17466,13 @@
   <p:clrMapOvr>
     <a:masterClrMapping/>
   </p:clrMapOvr>
-  <mc:AlternateContent xmlns:mc="http://schemas.openxmlformats.org/markup-compatibility/2006">
-    <mc:Choice xmlns:p14="http://schemas.microsoft.com/office/powerpoint/2010/main" Requires="p14">
+  <mc:AlternateContent xmlns:mc="http://schemas.openxmlformats.org/markup-compatibility/2006" xmlns:p14="http://schemas.microsoft.com/office/powerpoint/2010/main">
+    <mc:Choice Requires="p14">
       <p:transition p14:dur="100">
         <p:cut/>
       </p:transition>
     </mc:Choice>
-    <mc:Fallback>
+    <mc:Fallback xmlns="">
       <p:transition>
         <p:cut/>
       </p:transition>
@@ -16470,7 +17481,7 @@
 </p:sld>
 </file>
 
-<file path=ppt/slides/slide33.xml><?xml version="1.0" encoding="utf-8"?>
+<file path=ppt/slides/slide34.xml><?xml version="1.0" encoding="utf-8"?>
 <p:sld xmlns:a="http://schemas.openxmlformats.org/drawingml/2006/main" xmlns:r="http://schemas.openxmlformats.org/officeDocument/2006/relationships" xmlns:p="http://schemas.openxmlformats.org/presentationml/2006/main">
   <p:cSld>
     <p:spTree>
@@ -16672,7 +17683,7 @@
 </p:sld>
 </file>
 
-<file path=ppt/slides/slide34.xml><?xml version="1.0" encoding="utf-8"?>
+<file path=ppt/slides/slide35.xml><?xml version="1.0" encoding="utf-8"?>
 <p:sld xmlns:a="http://schemas.openxmlformats.org/drawingml/2006/main" xmlns:r="http://schemas.openxmlformats.org/officeDocument/2006/relationships" xmlns:p="http://schemas.openxmlformats.org/presentationml/2006/main">
   <p:cSld>
     <p:spTree>
@@ -16726,7 +17737,7 @@
             <a:pPr algn="ctr"/>
             <a:r>
               <a:rPr lang="en-US" b="1" dirty="0"/>
-              <a:t>Results and Evaluation metrics</a:t>
+              <a:t>       Results and Evaluation metrics</a:t>
             </a:r>
             <a:endParaRPr lang="en-IN" b="1" dirty="0"/>
           </a:p>
@@ -16766,78 +17777,6 @@
     <p:extLst>
       <p:ext uri="{BB962C8B-B14F-4D97-AF65-F5344CB8AC3E}">
         <p14:creationId xmlns:p14="http://schemas.microsoft.com/office/powerpoint/2010/main" val="3785077214"/>
-      </p:ext>
-    </p:extLst>
-  </p:cSld>
-  <p:clrMapOvr>
-    <a:masterClrMapping/>
-  </p:clrMapOvr>
-  <mc:AlternateContent xmlns:mc="http://schemas.openxmlformats.org/markup-compatibility/2006">
-    <mc:Choice xmlns:p14="http://schemas.microsoft.com/office/powerpoint/2010/main" Requires="p14">
-      <p:transition p14:dur="100">
-        <p:cut/>
-      </p:transition>
-    </mc:Choice>
-    <mc:Fallback>
-      <p:transition>
-        <p:cut/>
-      </p:transition>
-    </mc:Fallback>
-  </mc:AlternateContent>
-</p:sld>
-</file>
-
-<file path=ppt/slides/slide35.xml><?xml version="1.0" encoding="utf-8"?>
-<p:sld xmlns:a="http://schemas.openxmlformats.org/drawingml/2006/main" xmlns:r="http://schemas.openxmlformats.org/officeDocument/2006/relationships" xmlns:p="http://schemas.openxmlformats.org/presentationml/2006/main">
-  <p:cSld>
-    <p:spTree>
-      <p:nvGrpSpPr>
-        <p:cNvPr id="1" name=""/>
-        <p:cNvGrpSpPr/>
-        <p:nvPr/>
-      </p:nvGrpSpPr>
-      <p:grpSpPr>
-        <a:xfrm>
-          <a:off x="0" y="0"/>
-          <a:ext cx="0" cy="0"/>
-          <a:chOff x="0" y="0"/>
-          <a:chExt cx="0" cy="0"/>
-        </a:xfrm>
-      </p:grpSpPr>
-      <p:pic>
-        <p:nvPicPr>
-          <p:cNvPr id="3" name="Picture 2">
-            <a:extLst>
-              <a:ext uri="{FF2B5EF4-FFF2-40B4-BE49-F238E27FC236}">
-                <a16:creationId xmlns:a16="http://schemas.microsoft.com/office/drawing/2014/main" id="{F9659E80-0AC6-5173-70C2-B0AB3568EC82}"/>
-              </a:ext>
-            </a:extLst>
-          </p:cNvPr>
-          <p:cNvPicPr>
-            <a:picLocks noChangeAspect="1"/>
-          </p:cNvPicPr>
-          <p:nvPr/>
-        </p:nvPicPr>
-        <p:blipFill>
-          <a:blip r:embed="rId2"/>
-          <a:stretch>
-            <a:fillRect/>
-          </a:stretch>
-        </p:blipFill>
-        <p:spPr>
-          <a:xfrm>
-            <a:off x="1583457" y="836712"/>
-            <a:ext cx="7329267" cy="5688632"/>
-          </a:xfrm>
-          <a:prstGeom prst="rect">
-            <a:avLst/>
-          </a:prstGeom>
-        </p:spPr>
-      </p:pic>
-    </p:spTree>
-    <p:extLst>
-      <p:ext uri="{BB962C8B-B14F-4D97-AF65-F5344CB8AC3E}">
-        <p14:creationId xmlns:p14="http://schemas.microsoft.com/office/powerpoint/2010/main" val="2403605681"/>
       </p:ext>
     </p:extLst>
   </p:cSld>
@@ -17294,13 +18233,13 @@
   <p:clrMapOvr>
     <a:masterClrMapping/>
   </p:clrMapOvr>
-  <mc:AlternateContent xmlns:mc="http://schemas.openxmlformats.org/markup-compatibility/2006">
-    <mc:Choice xmlns:p14="http://schemas.microsoft.com/office/powerpoint/2010/main" Requires="p14">
+  <mc:AlternateContent xmlns:mc="http://schemas.openxmlformats.org/markup-compatibility/2006" xmlns:p14="http://schemas.microsoft.com/office/powerpoint/2010/main">
+    <mc:Choice Requires="p14">
       <p:transition p14:dur="100">
         <p:cut/>
       </p:transition>
     </mc:Choice>
-    <mc:Fallback>
+    <mc:Fallback xmlns="">
       <p:transition>
         <p:cut/>
       </p:transition>
@@ -17622,13 +18561,13 @@
   <p:clrMapOvr>
     <a:masterClrMapping/>
   </p:clrMapOvr>
-  <mc:AlternateContent xmlns:mc="http://schemas.openxmlformats.org/markup-compatibility/2006">
-    <mc:Choice xmlns:p14="http://schemas.microsoft.com/office/powerpoint/2010/main" Requires="p14">
+  <mc:AlternateContent xmlns:mc="http://schemas.openxmlformats.org/markup-compatibility/2006" xmlns:p14="http://schemas.microsoft.com/office/powerpoint/2010/main">
+    <mc:Choice Requires="p14">
       <p:transition p14:dur="100">
         <p:cut/>
       </p:transition>
     </mc:Choice>
-    <mc:Fallback>
+    <mc:Fallback xmlns="">
       <p:transition>
         <p:cut/>
       </p:transition>
@@ -17654,12 +18593,48 @@
           <a:chExt cx="0" cy="0"/>
         </a:xfrm>
       </p:grpSpPr>
+      <p:pic>
+        <p:nvPicPr>
+          <p:cNvPr id="3" name="Picture 2" descr="A screenshot of a computer&#10;&#10;AI-generated content may be incorrect.">
+            <a:extLst>
+              <a:ext uri="{FF2B5EF4-FFF2-40B4-BE49-F238E27FC236}">
+                <a16:creationId xmlns:a16="http://schemas.microsoft.com/office/drawing/2014/main" id="{AFFD479A-567E-4F8B-5E6E-786199B56B0D}"/>
+              </a:ext>
+            </a:extLst>
+          </p:cNvPr>
+          <p:cNvPicPr>
+            <a:picLocks noChangeAspect="1"/>
+          </p:cNvPicPr>
+          <p:nvPr/>
+        </p:nvPicPr>
+        <p:blipFill>
+          <a:blip r:embed="rId2" cstate="print">
+            <a:extLst>
+              <a:ext uri="{28A0092B-C50C-407E-A947-70E740481C1C}">
+                <a14:useLocalDpi xmlns:a14="http://schemas.microsoft.com/office/drawing/2010/main" val="0"/>
+              </a:ext>
+            </a:extLst>
+          </a:blip>
+          <a:stretch>
+            <a:fillRect/>
+          </a:stretch>
+        </p:blipFill>
+        <p:spPr>
+          <a:xfrm>
+            <a:off x="683357" y="1340768"/>
+            <a:ext cx="9433048" cy="5214174"/>
+          </a:xfrm>
+          <a:prstGeom prst="rect">
+            <a:avLst/>
+          </a:prstGeom>
+        </p:spPr>
+      </p:pic>
       <p:sp>
         <p:nvSpPr>
-          <p:cNvPr id="3" name="TextBox 2">
+          <p:cNvPr id="5" name="TextBox 4">
             <a:extLst>
               <a:ext uri="{FF2B5EF4-FFF2-40B4-BE49-F238E27FC236}">
-                <a16:creationId xmlns:a16="http://schemas.microsoft.com/office/drawing/2014/main" id="{20A313F9-BB8D-44F1-9DB3-B36A5B02C958}"/>
+                <a16:creationId xmlns:a16="http://schemas.microsoft.com/office/drawing/2014/main" id="{DEAB8101-F46F-3C81-25FC-FB00847FB525}"/>
               </a:ext>
             </a:extLst>
           </p:cNvPr>
@@ -17668,8 +18643,8 @@
         </p:nvSpPr>
         <p:spPr>
           <a:xfrm>
-            <a:off x="7344097" y="188640"/>
-            <a:ext cx="3594831" cy="461665"/>
+            <a:off x="3743697" y="836712"/>
+            <a:ext cx="3416320" cy="369332"/>
           </a:xfrm>
           <a:prstGeom prst="rect">
             <a:avLst/>
@@ -17677,354 +18652,22 @@
           <a:noFill/>
         </p:spPr>
         <p:txBody>
-          <a:bodyPr wrap="square" rtlCol="0">
+          <a:bodyPr wrap="none" rtlCol="0">
             <a:spAutoFit/>
           </a:bodyPr>
           <a:lstStyle/>
           <a:p>
-            <a:pPr algn="ctr"/>
-            <a:r>
-              <a:rPr lang="en-IN" sz="2400" b="1" dirty="0">
-                <a:solidFill>
-                  <a:srgbClr val="D47D26"/>
-                </a:solidFill>
-                <a:latin typeface="Times New Roman" panose="02020603050405020304" pitchFamily="18" charset="0"/>
-                <a:cs typeface="Times New Roman" panose="02020603050405020304" pitchFamily="18" charset="0"/>
-              </a:rPr>
-              <a:t>REFERENCES</a:t>
-            </a:r>
-          </a:p>
-        </p:txBody>
-      </p:sp>
-      <p:sp>
-        <p:nvSpPr>
-          <p:cNvPr id="5" name="TextBox 4">
-            <a:extLst>
-              <a:ext uri="{FF2B5EF4-FFF2-40B4-BE49-F238E27FC236}">
-                <a16:creationId xmlns:a16="http://schemas.microsoft.com/office/drawing/2014/main" id="{B77F5B72-1C01-48AA-BB4B-F5D7980AD148}"/>
-              </a:ext>
-            </a:extLst>
-          </p:cNvPr>
-          <p:cNvSpPr txBox="1"/>
-          <p:nvPr/>
-        </p:nvSpPr>
-        <p:spPr>
-          <a:xfrm>
-            <a:off x="935385" y="1484784"/>
-            <a:ext cx="9433048" cy="4191981"/>
-          </a:xfrm>
-          <a:prstGeom prst="rect">
-            <a:avLst/>
-          </a:prstGeom>
-          <a:noFill/>
-        </p:spPr>
-        <p:txBody>
-          <a:bodyPr wrap="square" rtlCol="0" anchor="t">
-            <a:spAutoFit/>
-          </a:bodyPr>
-          <a:lstStyle/>
-          <a:p>
-            <a:pPr marL="342900" indent="-342900">
-              <a:lnSpc>
-                <a:spcPct val="150000"/>
-              </a:lnSpc>
-              <a:buFont typeface="+mj-lt"/>
-              <a:buAutoNum type="arabicPeriod"/>
-            </a:pPr>
-            <a:endParaRPr lang="en-US" sz="2000" dirty="0">
-              <a:latin typeface="Times New Roman" panose="02020603050405020304" pitchFamily="18" charset="0"/>
-              <a:cs typeface="Times New Roman" panose="02020603050405020304" pitchFamily="18" charset="0"/>
-            </a:endParaRPr>
-          </a:p>
-          <a:p>
-            <a:pPr marL="342900" indent="-342900">
-              <a:lnSpc>
-                <a:spcPct val="150000"/>
-              </a:lnSpc>
-              <a:buFont typeface="+mj-lt"/>
-              <a:buAutoNum type="arabicPeriod"/>
-            </a:pPr>
-            <a:endParaRPr lang="en-US" sz="2000" dirty="0">
-              <a:latin typeface="Times New Roman" panose="02020603050405020304" pitchFamily="18" charset="0"/>
-              <a:cs typeface="Times New Roman" panose="02020603050405020304" pitchFamily="18" charset="0"/>
-            </a:endParaRPr>
-          </a:p>
-          <a:p>
-            <a:pPr marL="342900" indent="-342900">
-              <a:lnSpc>
-                <a:spcPct val="150000"/>
-              </a:lnSpc>
-              <a:buFont typeface="+mj-lt"/>
-              <a:buAutoNum type="arabicPeriod"/>
-            </a:pPr>
-            <a:endParaRPr lang="en-US" sz="2000" dirty="0">
-              <a:latin typeface="Times New Roman" panose="02020603050405020304" pitchFamily="18" charset="0"/>
-              <a:cs typeface="Times New Roman" panose="02020603050405020304" pitchFamily="18" charset="0"/>
-            </a:endParaRPr>
-          </a:p>
-          <a:p>
-            <a:pPr marL="342900" indent="-342900">
-              <a:lnSpc>
-                <a:spcPct val="150000"/>
-              </a:lnSpc>
-              <a:buFont typeface="+mj-lt"/>
-              <a:buAutoNum type="arabicPeriod"/>
-            </a:pPr>
-            <a:endParaRPr lang="en-US" sz="2000" dirty="0">
-              <a:latin typeface="Times New Roman" panose="02020603050405020304" pitchFamily="18" charset="0"/>
-              <a:cs typeface="Times New Roman" panose="02020603050405020304" pitchFamily="18" charset="0"/>
-            </a:endParaRPr>
-          </a:p>
-          <a:p>
-            <a:pPr marL="342900" indent="-342900">
-              <a:lnSpc>
-                <a:spcPct val="150000"/>
-              </a:lnSpc>
-              <a:buFont typeface="+mj-lt"/>
-              <a:buAutoNum type="arabicPeriod"/>
-            </a:pPr>
-            <a:endParaRPr lang="en-US" sz="2000" dirty="0">
-              <a:latin typeface="Times New Roman" panose="02020603050405020304" pitchFamily="18" charset="0"/>
-              <a:cs typeface="Times New Roman" panose="02020603050405020304" pitchFamily="18" charset="0"/>
-            </a:endParaRPr>
-          </a:p>
-          <a:p>
-            <a:pPr marL="342900" indent="-342900">
-              <a:lnSpc>
-                <a:spcPct val="150000"/>
-              </a:lnSpc>
-              <a:buFont typeface="+mj-lt"/>
-              <a:buAutoNum type="arabicPeriod"/>
-            </a:pPr>
-            <a:endParaRPr lang="en-US" sz="2000" dirty="0">
-              <a:latin typeface="Times New Roman" panose="02020603050405020304" pitchFamily="18" charset="0"/>
-              <a:cs typeface="Times New Roman" panose="02020603050405020304" pitchFamily="18" charset="0"/>
-            </a:endParaRPr>
-          </a:p>
-          <a:p>
-            <a:pPr marL="342900" indent="-342900">
-              <a:lnSpc>
-                <a:spcPct val="150000"/>
-              </a:lnSpc>
-              <a:buFont typeface="+mj-lt"/>
-              <a:buAutoNum type="arabicPeriod"/>
-            </a:pPr>
-            <a:endParaRPr lang="en-US" sz="2000" dirty="0">
-              <a:latin typeface="Times New Roman" panose="02020603050405020304" pitchFamily="18" charset="0"/>
-              <a:cs typeface="Times New Roman" panose="02020603050405020304" pitchFamily="18" charset="0"/>
-            </a:endParaRPr>
-          </a:p>
-          <a:p>
-            <a:pPr marL="342900" indent="-342900">
-              <a:lnSpc>
-                <a:spcPct val="150000"/>
-              </a:lnSpc>
-              <a:buFont typeface="+mj-lt"/>
-              <a:buAutoNum type="arabicPeriod"/>
-            </a:pPr>
-            <a:endParaRPr lang="en-US" sz="2000" dirty="0">
-              <a:latin typeface="Times New Roman" panose="02020603050405020304" pitchFamily="18" charset="0"/>
-              <a:cs typeface="Times New Roman" panose="02020603050405020304" pitchFamily="18" charset="0"/>
-            </a:endParaRPr>
-          </a:p>
-          <a:p>
-            <a:pPr marL="342900" indent="-342900">
-              <a:lnSpc>
-                <a:spcPct val="150000"/>
-              </a:lnSpc>
-              <a:buFont typeface="+mj-lt"/>
-              <a:buAutoNum type="arabicPeriod"/>
-            </a:pPr>
-            <a:endParaRPr lang="en-US" sz="2000" dirty="0">
-              <a:latin typeface="Times New Roman" panose="02020603050405020304" pitchFamily="18" charset="0"/>
-              <a:cs typeface="Times New Roman" panose="02020603050405020304" pitchFamily="18" charset="0"/>
-            </a:endParaRPr>
-          </a:p>
-        </p:txBody>
-      </p:sp>
-      <p:sp>
-        <p:nvSpPr>
-          <p:cNvPr id="2" name="Rectangle 1">
-            <a:extLst>
-              <a:ext uri="{FF2B5EF4-FFF2-40B4-BE49-F238E27FC236}">
-                <a16:creationId xmlns:a16="http://schemas.microsoft.com/office/drawing/2014/main" id="{142A7A5D-CDDA-0AD7-9722-9B33E75EF5A6}"/>
-              </a:ext>
-            </a:extLst>
-          </p:cNvPr>
-          <p:cNvSpPr>
-            <a:spLocks noChangeArrowheads="1"/>
-          </p:cNvSpPr>
-          <p:nvPr/>
-        </p:nvSpPr>
-        <p:spPr bwMode="auto">
-          <a:xfrm>
-            <a:off x="359321" y="1271356"/>
-            <a:ext cx="9648354" cy="3970318"/>
-          </a:xfrm>
-          <a:prstGeom prst="rect">
-            <a:avLst/>
-          </a:prstGeom>
-          <a:noFill/>
-          <a:ln>
-            <a:noFill/>
-          </a:ln>
-          <a:effectLst/>
-          <a:extLst>
-            <a:ext uri="{909E8E84-426E-40DD-AFC4-6F175D3DCCD1}">
-              <a14:hiddenFill xmlns:a14="http://schemas.microsoft.com/office/drawing/2010/main">
-                <a:solidFill>
-                  <a:schemeClr val="accent1"/>
-                </a:solidFill>
-              </a14:hiddenFill>
-            </a:ext>
-            <a:ext uri="{91240B29-F687-4F45-9708-019B960494DF}">
-              <a14:hiddenLine xmlns:a14="http://schemas.microsoft.com/office/drawing/2010/main" w="9525">
-                <a:solidFill>
-                  <a:schemeClr val="tx1"/>
-                </a:solidFill>
-                <a:miter lim="800000"/>
-                <a:headEnd/>
-                <a:tailEnd/>
-              </a14:hiddenLine>
-            </a:ext>
-            <a:ext uri="{AF507438-7753-43E0-B8FC-AC1667EBCBE1}">
-              <a14:hiddenEffects xmlns:a14="http://schemas.microsoft.com/office/drawing/2010/main">
-                <a:effectLst>
-                  <a:outerShdw dist="35921" dir="2700000" algn="ctr" rotWithShape="0">
-                    <a:schemeClr val="bg2"/>
-                  </a:outerShdw>
-                </a:effectLst>
-              </a14:hiddenEffects>
-            </a:ext>
-          </a:extLst>
-        </p:spPr>
-        <p:txBody>
-          <a:bodyPr vert="horz" wrap="square" lIns="91440" tIns="45720" rIns="91440" bIns="45720" numCol="1" anchor="ctr" anchorCtr="0" compatLnSpc="1">
-            <a:prstTxWarp prst="textNoShape">
-              <a:avLst/>
-            </a:prstTxWarp>
-            <a:spAutoFit/>
-          </a:bodyPr>
-          <a:lstStyle/>
-          <a:p>
-            <a:pPr algn="just"/>
-            <a:r>
-              <a:rPr lang="en-IN" dirty="0">
-                <a:latin typeface="Times New Roman" panose="02020603050405020304" pitchFamily="18" charset="0"/>
-                <a:cs typeface="Times New Roman" panose="02020603050405020304" pitchFamily="18" charset="0"/>
-              </a:rPr>
-              <a:t>[1]. Hajek, P., Abedin, M.Z., &amp; Sivarajah, U. (2023). Fraud Detection in Mobile Payment Systems using an </a:t>
-            </a:r>
-            <a:r>
-              <a:rPr lang="en-IN" dirty="0" err="1">
-                <a:latin typeface="Times New Roman" panose="02020603050405020304" pitchFamily="18" charset="0"/>
-                <a:cs typeface="Times New Roman" panose="02020603050405020304" pitchFamily="18" charset="0"/>
-              </a:rPr>
-              <a:t>XGBoost</a:t>
-            </a:r>
-            <a:r>
-              <a:rPr lang="en-IN" dirty="0">
-                <a:latin typeface="Times New Roman" panose="02020603050405020304" pitchFamily="18" charset="0"/>
-                <a:cs typeface="Times New Roman" panose="02020603050405020304" pitchFamily="18" charset="0"/>
-              </a:rPr>
-              <a:t>-based Framework. Information Systems Frontiers, 25, 1985–2003.</a:t>
-            </a:r>
-          </a:p>
-          <a:p>
-            <a:pPr algn="just"/>
-            <a:endParaRPr lang="en-IN" dirty="0">
-              <a:latin typeface="Times New Roman" panose="02020603050405020304" pitchFamily="18" charset="0"/>
-              <a:cs typeface="Times New Roman" panose="02020603050405020304" pitchFamily="18" charset="0"/>
-            </a:endParaRPr>
-          </a:p>
-          <a:p>
-            <a:pPr algn="just"/>
-            <a:r>
-              <a:rPr lang="en-IN" dirty="0">
-                <a:latin typeface="Times New Roman" panose="02020603050405020304" pitchFamily="18" charset="0"/>
-                <a:cs typeface="Times New Roman" panose="02020603050405020304" pitchFamily="18" charset="0"/>
-              </a:rPr>
-              <a:t>[2].Nagarajan, P., &amp; Kamali, B. (2024). Fraud Detection in Online Transactions using Hybrid CNN and XGBOOST. Proceedings of the 2024 International Conference on Emerging Research in Computational Science.</a:t>
-            </a:r>
-          </a:p>
-          <a:p>
-            <a:pPr algn="just"/>
-            <a:endParaRPr lang="en-IN" dirty="0">
-              <a:latin typeface="Times New Roman" panose="02020603050405020304" pitchFamily="18" charset="0"/>
-              <a:cs typeface="Times New Roman" panose="02020603050405020304" pitchFamily="18" charset="0"/>
-            </a:endParaRPr>
-          </a:p>
-          <a:p>
-            <a:pPr algn="just"/>
-            <a:r>
-              <a:rPr lang="en-IN" dirty="0">
-                <a:latin typeface="Times New Roman" panose="02020603050405020304" pitchFamily="18" charset="0"/>
-                <a:cs typeface="Times New Roman" panose="02020603050405020304" pitchFamily="18" charset="0"/>
-              </a:rPr>
-              <a:t>[3].Negi, A., &amp; Kumar, D. (2025). Fraud Detection in Financial Transactions Using Machine Learning Techniques. Proceedings of the 2025 International Conference on Networks and Cryptology.</a:t>
-            </a:r>
-          </a:p>
-          <a:p>
-            <a:pPr algn="just"/>
-            <a:endParaRPr lang="en-IN" dirty="0">
-              <a:latin typeface="Times New Roman" panose="02020603050405020304" pitchFamily="18" charset="0"/>
-              <a:cs typeface="Times New Roman" panose="02020603050405020304" pitchFamily="18" charset="0"/>
-            </a:endParaRPr>
-          </a:p>
-          <a:p>
-            <a:pPr algn="just"/>
-            <a:r>
-              <a:rPr lang="en-IN" dirty="0">
-                <a:latin typeface="Times New Roman" panose="02020603050405020304" pitchFamily="18" charset="0"/>
-                <a:cs typeface="Times New Roman" panose="02020603050405020304" pitchFamily="18" charset="0"/>
-              </a:rPr>
-              <a:t>[4]Chen, H., &amp; Chen, L. (2022). An application of the </a:t>
-            </a:r>
-            <a:r>
-              <a:rPr lang="en-IN" dirty="0" err="1">
-                <a:latin typeface="Times New Roman" panose="02020603050405020304" pitchFamily="18" charset="0"/>
-                <a:cs typeface="Times New Roman" panose="02020603050405020304" pitchFamily="18" charset="0"/>
-              </a:rPr>
-              <a:t>XGBoost</a:t>
-            </a:r>
-            <a:r>
-              <a:rPr lang="en-IN" dirty="0">
-                <a:latin typeface="Times New Roman" panose="02020603050405020304" pitchFamily="18" charset="0"/>
-                <a:cs typeface="Times New Roman" panose="02020603050405020304" pitchFamily="18" charset="0"/>
-              </a:rPr>
-              <a:t> algorithm for online transaction fraud detection based on an improved sailfish optimiser. Proceedings of the 4th International Conference on Machine Learning, Big Data and Business Intelligence.</a:t>
-            </a:r>
-          </a:p>
-          <a:p>
-            <a:pPr marL="0" marR="0" lvl="0" indent="0" algn="just" defTabSz="914400" rtl="0" eaLnBrk="0" fontAlgn="base" latinLnBrk="0" hangingPunct="0">
-              <a:spcBef>
-                <a:spcPct val="0"/>
-              </a:spcBef>
-              <a:spcAft>
-                <a:spcPct val="0"/>
-              </a:spcAft>
-              <a:buClrTx/>
-              <a:buSzTx/>
-              <a:tabLst/>
-            </a:pPr>
-            <a:endParaRPr kumimoji="0" lang="en-US" altLang="en-US" sz="1800" b="0" i="0" u="none" strike="noStrike" cap="none" normalizeH="0" baseline="0" dirty="0">
-              <a:ln>
-                <a:noFill/>
-              </a:ln>
-              <a:solidFill>
-                <a:schemeClr val="tx1"/>
-              </a:solidFill>
-              <a:effectLst/>
-              <a:latin typeface="Times New Roman" panose="02020603050405020304" pitchFamily="18" charset="0"/>
-              <a:cs typeface="Times New Roman" panose="02020603050405020304" pitchFamily="18" charset="0"/>
-            </a:endParaRPr>
+            <a:r>
+              <a:rPr lang="en-IN" b="1" dirty="0"/>
+              <a:t>User Interface Demonstration</a:t>
+            </a:r>
           </a:p>
         </p:txBody>
       </p:sp>
     </p:spTree>
     <p:extLst>
       <p:ext uri="{BB962C8B-B14F-4D97-AF65-F5344CB8AC3E}">
-        <p14:creationId xmlns:p14="http://schemas.microsoft.com/office/powerpoint/2010/main" val="2126352998"/>
+        <p14:creationId xmlns:p14="http://schemas.microsoft.com/office/powerpoint/2010/main" val="2667281482"/>
       </p:ext>
     </p:extLst>
   </p:cSld>
@@ -18065,67 +18708,183 @@
       </p:grpSpPr>
       <p:sp>
         <p:nvSpPr>
-          <p:cNvPr id="2" name="TextBox 1"/>
+          <p:cNvPr id="2" name="TextBox 1">
+            <a:extLst>
+              <a:ext uri="{FF2B5EF4-FFF2-40B4-BE49-F238E27FC236}">
+                <a16:creationId xmlns:a16="http://schemas.microsoft.com/office/drawing/2014/main" id="{185390B3-742E-DA98-7BA5-DF7E76129F19}"/>
+              </a:ext>
+            </a:extLst>
+          </p:cNvPr>
           <p:cNvSpPr txBox="1"/>
           <p:nvPr/>
         </p:nvSpPr>
         <p:spPr>
           <a:xfrm>
-            <a:off x="1825539" y="1982450"/>
-            <a:ext cx="7148684" cy="1446550"/>
+            <a:off x="287313" y="2348880"/>
+            <a:ext cx="5541902" cy="2031325"/>
           </a:xfrm>
           <a:prstGeom prst="rect">
             <a:avLst/>
           </a:prstGeom>
+          <a:noFill/>
         </p:spPr>
         <p:txBody>
-          <a:bodyPr rot="0" spcFirstLastPara="0" vertOverflow="overflow" horzOverflow="overflow" vert="horz" wrap="square" lIns="91440" tIns="45720" rIns="91440" bIns="45720" numCol="1" spcCol="0" rtlCol="0" fromWordArt="0" anchor="t" anchorCtr="0" forceAA="0" compatLnSpc="1">
-            <a:prstTxWarp prst="textNoShape">
-              <a:avLst/>
-            </a:prstTxWarp>
+          <a:bodyPr wrap="none" rtlCol="0">
             <a:spAutoFit/>
           </a:bodyPr>
           <a:lstStyle/>
           <a:p>
-            <a:pPr algn="ctr"/>
-            <a:r>
-              <a:rPr lang="en-US" sz="4800" b="1" dirty="0">
-                <a:solidFill>
-                  <a:srgbClr val="D47D26"/>
-                </a:solidFill>
-                <a:latin typeface="Times New Roman" panose="02020603050405020304" pitchFamily="18" charset="0"/>
-                <a:cs typeface="Times New Roman" panose="02020603050405020304" pitchFamily="18" charset="0"/>
+            <a:r>
+              <a:rPr lang="en-US" b="1" dirty="0"/>
+              <a:t>GitHub Repo – </a:t>
+            </a:r>
+            <a:r>
+              <a:rPr lang="en-US" dirty="0"/>
+              <a:t>Complete project code</a:t>
+            </a:r>
+          </a:p>
+          <a:p>
+            <a:r>
+              <a:rPr lang="en-US" dirty="0"/>
+              <a:t> </a:t>
+            </a:r>
+            <a:r>
+              <a:rPr lang="en-IN" dirty="0"/>
+              <a:t>🔗 </a:t>
+            </a:r>
+            <a:r>
+              <a:rPr lang="en-US" b="1" dirty="0" err="1">
+                <a:hlinkClick r:id="rId2">
+                  <a:extLst>
+                    <a:ext uri="{A12FA001-AC4F-418D-AE19-62706E023703}">
+                      <ahyp:hlinkClr xmlns:ahyp="http://schemas.microsoft.com/office/drawing/2018/hyperlinkcolor" val="tx"/>
+                    </a:ext>
+                  </a:extLst>
+                </a:hlinkClick>
               </a:rPr>
-              <a:t>THANK</a:t>
-            </a:r>
-            <a:r>
-              <a:rPr lang="en-US" sz="8800" dirty="0">
-                <a:latin typeface="Times New Roman" panose="02020603050405020304" pitchFamily="18" charset="0"/>
-                <a:cs typeface="Times New Roman" panose="02020603050405020304" pitchFamily="18" charset="0"/>
+              <a:t>github</a:t>
+            </a:r>
+            <a:r>
+              <a:rPr lang="en-US" b="1" dirty="0">
+                <a:hlinkClick r:id="rId2">
+                  <a:extLst>
+                    <a:ext uri="{A12FA001-AC4F-418D-AE19-62706E023703}">
+                      <ahyp:hlinkClr xmlns:ahyp="http://schemas.microsoft.com/office/drawing/2018/hyperlinkcolor" val="tx"/>
+                    </a:ext>
+                  </a:extLst>
+                </a:hlinkClick>
               </a:rPr>
+              <a:t>/SUHAAS_D</a:t>
+            </a:r>
+            <a:endParaRPr lang="en-US" b="1" dirty="0"/>
+          </a:p>
+          <a:p>
+            <a:endParaRPr lang="en-US" b="1" dirty="0"/>
+          </a:p>
+          <a:p>
+            <a:endParaRPr lang="en-US" dirty="0"/>
+          </a:p>
+          <a:p>
+            <a:r>
+              <a:rPr lang="en-US" b="1" dirty="0"/>
+              <a:t>GitHub Project Commits </a:t>
+            </a:r>
+            <a:r>
+              <a:rPr lang="en-US" dirty="0"/>
+              <a:t>– Full Commit History</a:t>
+            </a:r>
+          </a:p>
+          <a:p>
+            <a:endParaRPr lang="en-US" dirty="0"/>
+          </a:p>
+          <a:p>
+            <a:r>
+              <a:rPr lang="en-IN" dirty="0"/>
+              <a:t>🔗 </a:t>
+            </a:r>
+            <a:r>
+              <a:rPr lang="en-US" b="1" dirty="0" err="1">
+                <a:hlinkClick r:id="rId3">
+                  <a:extLst>
+                    <a:ext uri="{A12FA001-AC4F-418D-AE19-62706E023703}">
+                      <ahyp:hlinkClr xmlns:ahyp="http://schemas.microsoft.com/office/drawing/2018/hyperlinkcolor" val="tx"/>
+                    </a:ext>
+                  </a:extLst>
+                </a:hlinkClick>
+              </a:rPr>
+              <a:t>github</a:t>
+            </a:r>
+            <a:r>
+              <a:rPr lang="en-US" b="1" dirty="0">
+                <a:hlinkClick r:id="rId3">
+                  <a:extLst>
+                    <a:ext uri="{A12FA001-AC4F-418D-AE19-62706E023703}">
+                      <ahyp:hlinkClr xmlns:ahyp="http://schemas.microsoft.com/office/drawing/2018/hyperlinkcolor" val="tx"/>
+                    </a:ext>
+                  </a:extLst>
+                </a:hlinkClick>
+              </a:rPr>
+              <a:t>/SUHAAS_D/</a:t>
+            </a:r>
+            <a:r>
+              <a:rPr lang="en-US" b="1" dirty="0" err="1">
+                <a:hlinkClick r:id="rId3">
+                  <a:extLst>
+                    <a:ext uri="{A12FA001-AC4F-418D-AE19-62706E023703}">
+                      <ahyp:hlinkClr xmlns:ahyp="http://schemas.microsoft.com/office/drawing/2018/hyperlinkcolor" val="tx"/>
+                    </a:ext>
+                  </a:extLst>
+                </a:hlinkClick>
+              </a:rPr>
+              <a:t>fraud_detection_commits</a:t>
+            </a:r>
+            <a:r>
+              <a:rPr lang="en-US" b="1" dirty="0"/>
               <a:t> </a:t>
             </a:r>
-            <a:r>
-              <a:rPr lang="en-US" sz="4800" b="1" dirty="0">
-                <a:solidFill>
-                  <a:srgbClr val="D47D26"/>
-                </a:solidFill>
-                <a:latin typeface="Times New Roman" panose="02020603050405020304" pitchFamily="18" charset="0"/>
-                <a:cs typeface="Times New Roman" panose="02020603050405020304" pitchFamily="18" charset="0"/>
-              </a:rPr>
-              <a:t>YOU</a:t>
-            </a:r>
-            <a:endParaRPr lang="en-US" sz="4800" dirty="0">
-              <a:latin typeface="Times New Roman" panose="02020603050405020304" pitchFamily="18" charset="0"/>
-              <a:cs typeface="Times New Roman" panose="02020603050405020304" pitchFamily="18" charset="0"/>
-            </a:endParaRPr>
+            <a:endParaRPr lang="en-IN" b="1" dirty="0"/>
+          </a:p>
+        </p:txBody>
+      </p:sp>
+      <p:sp>
+        <p:nvSpPr>
+          <p:cNvPr id="3" name="TextBox 2">
+            <a:extLst>
+              <a:ext uri="{FF2B5EF4-FFF2-40B4-BE49-F238E27FC236}">
+                <a16:creationId xmlns:a16="http://schemas.microsoft.com/office/drawing/2014/main" id="{ECB7A64D-559B-30D1-67FD-0B872897D4D3}"/>
+              </a:ext>
+            </a:extLst>
+          </p:cNvPr>
+          <p:cNvSpPr txBox="1"/>
+          <p:nvPr/>
+        </p:nvSpPr>
+        <p:spPr>
+          <a:xfrm>
+            <a:off x="3455665" y="908720"/>
+            <a:ext cx="4211409" cy="369332"/>
+          </a:xfrm>
+          <a:prstGeom prst="rect">
+            <a:avLst/>
+          </a:prstGeom>
+          <a:noFill/>
+        </p:spPr>
+        <p:txBody>
+          <a:bodyPr wrap="none" rtlCol="0">
+            <a:spAutoFit/>
+          </a:bodyPr>
+          <a:lstStyle/>
+          <a:p>
+            <a:r>
+              <a:rPr lang="en-IN" b="1" dirty="0"/>
+              <a:t>Project Repository &amp; Documentation</a:t>
+            </a:r>
           </a:p>
         </p:txBody>
       </p:sp>
     </p:spTree>
     <p:extLst>
       <p:ext uri="{BB962C8B-B14F-4D97-AF65-F5344CB8AC3E}">
-        <p14:creationId xmlns:p14="http://schemas.microsoft.com/office/powerpoint/2010/main" val="3760984619"/>
+        <p14:creationId xmlns:p14="http://schemas.microsoft.com/office/powerpoint/2010/main" val="2758030600"/>
       </p:ext>
     </p:extLst>
   </p:cSld>
@@ -19341,6 +20100,588 @@
 </p:sld>
 </file>
 
+<file path=ppt/slides/slide40.xml><?xml version="1.0" encoding="utf-8"?>
+<p:sld xmlns:a="http://schemas.openxmlformats.org/drawingml/2006/main" xmlns:r="http://schemas.openxmlformats.org/officeDocument/2006/relationships" xmlns:p="http://schemas.openxmlformats.org/presentationml/2006/main">
+  <p:cSld>
+    <p:spTree>
+      <p:nvGrpSpPr>
+        <p:cNvPr id="1" name=""/>
+        <p:cNvGrpSpPr/>
+        <p:nvPr/>
+      </p:nvGrpSpPr>
+      <p:grpSpPr>
+        <a:xfrm>
+          <a:off x="0" y="0"/>
+          <a:ext cx="0" cy="0"/>
+          <a:chOff x="0" y="0"/>
+          <a:chExt cx="0" cy="0"/>
+        </a:xfrm>
+      </p:grpSpPr>
+      <p:sp>
+        <p:nvSpPr>
+          <p:cNvPr id="3" name="TextBox 2">
+            <a:extLst>
+              <a:ext uri="{FF2B5EF4-FFF2-40B4-BE49-F238E27FC236}">
+                <a16:creationId xmlns:a16="http://schemas.microsoft.com/office/drawing/2014/main" id="{20A313F9-BB8D-44F1-9DB3-B36A5B02C958}"/>
+              </a:ext>
+            </a:extLst>
+          </p:cNvPr>
+          <p:cNvSpPr txBox="1"/>
+          <p:nvPr/>
+        </p:nvSpPr>
+        <p:spPr>
+          <a:xfrm>
+            <a:off x="7344097" y="188640"/>
+            <a:ext cx="3594831" cy="461665"/>
+          </a:xfrm>
+          <a:prstGeom prst="rect">
+            <a:avLst/>
+          </a:prstGeom>
+          <a:noFill/>
+        </p:spPr>
+        <p:txBody>
+          <a:bodyPr wrap="square" rtlCol="0">
+            <a:spAutoFit/>
+          </a:bodyPr>
+          <a:lstStyle/>
+          <a:p>
+            <a:pPr algn="ctr"/>
+            <a:r>
+              <a:rPr lang="en-IN" sz="2400" b="1" dirty="0">
+                <a:solidFill>
+                  <a:srgbClr val="D47D26"/>
+                </a:solidFill>
+                <a:latin typeface="Times New Roman" panose="02020603050405020304" pitchFamily="18" charset="0"/>
+                <a:cs typeface="Times New Roman" panose="02020603050405020304" pitchFamily="18" charset="0"/>
+              </a:rPr>
+              <a:t>REFERENCES</a:t>
+            </a:r>
+          </a:p>
+        </p:txBody>
+      </p:sp>
+      <p:sp>
+        <p:nvSpPr>
+          <p:cNvPr id="5" name="TextBox 4">
+            <a:extLst>
+              <a:ext uri="{FF2B5EF4-FFF2-40B4-BE49-F238E27FC236}">
+                <a16:creationId xmlns:a16="http://schemas.microsoft.com/office/drawing/2014/main" id="{B77F5B72-1C01-48AA-BB4B-F5D7980AD148}"/>
+              </a:ext>
+            </a:extLst>
+          </p:cNvPr>
+          <p:cNvSpPr txBox="1"/>
+          <p:nvPr/>
+        </p:nvSpPr>
+        <p:spPr>
+          <a:xfrm>
+            <a:off x="935385" y="1484784"/>
+            <a:ext cx="9433048" cy="4191981"/>
+          </a:xfrm>
+          <a:prstGeom prst="rect">
+            <a:avLst/>
+          </a:prstGeom>
+          <a:noFill/>
+        </p:spPr>
+        <p:txBody>
+          <a:bodyPr wrap="square" rtlCol="0" anchor="t">
+            <a:spAutoFit/>
+          </a:bodyPr>
+          <a:lstStyle/>
+          <a:p>
+            <a:pPr marL="342900" indent="-342900">
+              <a:lnSpc>
+                <a:spcPct val="150000"/>
+              </a:lnSpc>
+              <a:buFont typeface="+mj-lt"/>
+              <a:buAutoNum type="arabicPeriod"/>
+            </a:pPr>
+            <a:endParaRPr lang="en-US" sz="2000" dirty="0">
+              <a:latin typeface="Times New Roman" panose="02020603050405020304" pitchFamily="18" charset="0"/>
+              <a:cs typeface="Times New Roman" panose="02020603050405020304" pitchFamily="18" charset="0"/>
+            </a:endParaRPr>
+          </a:p>
+          <a:p>
+            <a:pPr marL="342900" indent="-342900">
+              <a:lnSpc>
+                <a:spcPct val="150000"/>
+              </a:lnSpc>
+              <a:buFont typeface="+mj-lt"/>
+              <a:buAutoNum type="arabicPeriod"/>
+            </a:pPr>
+            <a:endParaRPr lang="en-US" sz="2000" dirty="0">
+              <a:latin typeface="Times New Roman" panose="02020603050405020304" pitchFamily="18" charset="0"/>
+              <a:cs typeface="Times New Roman" panose="02020603050405020304" pitchFamily="18" charset="0"/>
+            </a:endParaRPr>
+          </a:p>
+          <a:p>
+            <a:pPr marL="342900" indent="-342900">
+              <a:lnSpc>
+                <a:spcPct val="150000"/>
+              </a:lnSpc>
+              <a:buFont typeface="+mj-lt"/>
+              <a:buAutoNum type="arabicPeriod"/>
+            </a:pPr>
+            <a:endParaRPr lang="en-US" sz="2000" dirty="0">
+              <a:latin typeface="Times New Roman" panose="02020603050405020304" pitchFamily="18" charset="0"/>
+              <a:cs typeface="Times New Roman" panose="02020603050405020304" pitchFamily="18" charset="0"/>
+            </a:endParaRPr>
+          </a:p>
+          <a:p>
+            <a:pPr marL="342900" indent="-342900">
+              <a:lnSpc>
+                <a:spcPct val="150000"/>
+              </a:lnSpc>
+              <a:buFont typeface="+mj-lt"/>
+              <a:buAutoNum type="arabicPeriod"/>
+            </a:pPr>
+            <a:endParaRPr lang="en-US" sz="2000" dirty="0">
+              <a:latin typeface="Times New Roman" panose="02020603050405020304" pitchFamily="18" charset="0"/>
+              <a:cs typeface="Times New Roman" panose="02020603050405020304" pitchFamily="18" charset="0"/>
+            </a:endParaRPr>
+          </a:p>
+          <a:p>
+            <a:pPr marL="342900" indent="-342900">
+              <a:lnSpc>
+                <a:spcPct val="150000"/>
+              </a:lnSpc>
+              <a:buFont typeface="+mj-lt"/>
+              <a:buAutoNum type="arabicPeriod"/>
+            </a:pPr>
+            <a:endParaRPr lang="en-US" sz="2000" dirty="0">
+              <a:latin typeface="Times New Roman" panose="02020603050405020304" pitchFamily="18" charset="0"/>
+              <a:cs typeface="Times New Roman" panose="02020603050405020304" pitchFamily="18" charset="0"/>
+            </a:endParaRPr>
+          </a:p>
+          <a:p>
+            <a:pPr marL="342900" indent="-342900">
+              <a:lnSpc>
+                <a:spcPct val="150000"/>
+              </a:lnSpc>
+              <a:buFont typeface="+mj-lt"/>
+              <a:buAutoNum type="arabicPeriod"/>
+            </a:pPr>
+            <a:endParaRPr lang="en-US" sz="2000" dirty="0">
+              <a:latin typeface="Times New Roman" panose="02020603050405020304" pitchFamily="18" charset="0"/>
+              <a:cs typeface="Times New Roman" panose="02020603050405020304" pitchFamily="18" charset="0"/>
+            </a:endParaRPr>
+          </a:p>
+          <a:p>
+            <a:pPr marL="342900" indent="-342900">
+              <a:lnSpc>
+                <a:spcPct val="150000"/>
+              </a:lnSpc>
+              <a:buFont typeface="+mj-lt"/>
+              <a:buAutoNum type="arabicPeriod"/>
+            </a:pPr>
+            <a:endParaRPr lang="en-US" sz="2000" dirty="0">
+              <a:latin typeface="Times New Roman" panose="02020603050405020304" pitchFamily="18" charset="0"/>
+              <a:cs typeface="Times New Roman" panose="02020603050405020304" pitchFamily="18" charset="0"/>
+            </a:endParaRPr>
+          </a:p>
+          <a:p>
+            <a:pPr marL="342900" indent="-342900">
+              <a:lnSpc>
+                <a:spcPct val="150000"/>
+              </a:lnSpc>
+              <a:buFont typeface="+mj-lt"/>
+              <a:buAutoNum type="arabicPeriod"/>
+            </a:pPr>
+            <a:endParaRPr lang="en-US" sz="2000" dirty="0">
+              <a:latin typeface="Times New Roman" panose="02020603050405020304" pitchFamily="18" charset="0"/>
+              <a:cs typeface="Times New Roman" panose="02020603050405020304" pitchFamily="18" charset="0"/>
+            </a:endParaRPr>
+          </a:p>
+          <a:p>
+            <a:pPr marL="342900" indent="-342900">
+              <a:lnSpc>
+                <a:spcPct val="150000"/>
+              </a:lnSpc>
+              <a:buFont typeface="+mj-lt"/>
+              <a:buAutoNum type="arabicPeriod"/>
+            </a:pPr>
+            <a:endParaRPr lang="en-US" sz="2000" dirty="0">
+              <a:latin typeface="Times New Roman" panose="02020603050405020304" pitchFamily="18" charset="0"/>
+              <a:cs typeface="Times New Roman" panose="02020603050405020304" pitchFamily="18" charset="0"/>
+            </a:endParaRPr>
+          </a:p>
+        </p:txBody>
+      </p:sp>
+      <p:sp>
+        <p:nvSpPr>
+          <p:cNvPr id="2" name="Rectangle 1">
+            <a:extLst>
+              <a:ext uri="{FF2B5EF4-FFF2-40B4-BE49-F238E27FC236}">
+                <a16:creationId xmlns:a16="http://schemas.microsoft.com/office/drawing/2014/main" id="{142A7A5D-CDDA-0AD7-9722-9B33E75EF5A6}"/>
+              </a:ext>
+            </a:extLst>
+          </p:cNvPr>
+          <p:cNvSpPr>
+            <a:spLocks noChangeArrowheads="1"/>
+          </p:cNvSpPr>
+          <p:nvPr/>
+        </p:nvSpPr>
+        <p:spPr bwMode="auto">
+          <a:xfrm>
+            <a:off x="359321" y="1271356"/>
+            <a:ext cx="9648354" cy="3970318"/>
+          </a:xfrm>
+          <a:prstGeom prst="rect">
+            <a:avLst/>
+          </a:prstGeom>
+          <a:noFill/>
+          <a:ln>
+            <a:noFill/>
+          </a:ln>
+          <a:effectLst/>
+          <a:extLst>
+            <a:ext uri="{909E8E84-426E-40DD-AFC4-6F175D3DCCD1}">
+              <a14:hiddenFill xmlns:a14="http://schemas.microsoft.com/office/drawing/2010/main">
+                <a:solidFill>
+                  <a:schemeClr val="accent1"/>
+                </a:solidFill>
+              </a14:hiddenFill>
+            </a:ext>
+            <a:ext uri="{91240B29-F687-4F45-9708-019B960494DF}">
+              <a14:hiddenLine xmlns:a14="http://schemas.microsoft.com/office/drawing/2010/main" w="9525">
+                <a:solidFill>
+                  <a:schemeClr val="tx1"/>
+                </a:solidFill>
+                <a:miter lim="800000"/>
+                <a:headEnd/>
+                <a:tailEnd/>
+              </a14:hiddenLine>
+            </a:ext>
+            <a:ext uri="{AF507438-7753-43E0-B8FC-AC1667EBCBE1}">
+              <a14:hiddenEffects xmlns:a14="http://schemas.microsoft.com/office/drawing/2010/main">
+                <a:effectLst>
+                  <a:outerShdw dist="35921" dir="2700000" algn="ctr" rotWithShape="0">
+                    <a:schemeClr val="bg2"/>
+                  </a:outerShdw>
+                </a:effectLst>
+              </a14:hiddenEffects>
+            </a:ext>
+          </a:extLst>
+        </p:spPr>
+        <p:txBody>
+          <a:bodyPr vert="horz" wrap="square" lIns="91440" tIns="45720" rIns="91440" bIns="45720" numCol="1" anchor="ctr" anchorCtr="0" compatLnSpc="1">
+            <a:prstTxWarp prst="textNoShape">
+              <a:avLst/>
+            </a:prstTxWarp>
+            <a:spAutoFit/>
+          </a:bodyPr>
+          <a:lstStyle/>
+          <a:p>
+            <a:pPr algn="just"/>
+            <a:r>
+              <a:rPr lang="en-IN" dirty="0">
+                <a:latin typeface="Times New Roman" panose="02020603050405020304" pitchFamily="18" charset="0"/>
+                <a:cs typeface="Times New Roman" panose="02020603050405020304" pitchFamily="18" charset="0"/>
+              </a:rPr>
+              <a:t>[1]. Hajek, P., Abedin, M.Z., &amp; Sivarajah, U. (2023). Fraud Detection in Mobile Payment Systems using an </a:t>
+            </a:r>
+            <a:r>
+              <a:rPr lang="en-IN" dirty="0" err="1">
+                <a:latin typeface="Times New Roman" panose="02020603050405020304" pitchFamily="18" charset="0"/>
+                <a:cs typeface="Times New Roman" panose="02020603050405020304" pitchFamily="18" charset="0"/>
+              </a:rPr>
+              <a:t>XGBoost</a:t>
+            </a:r>
+            <a:r>
+              <a:rPr lang="en-IN" dirty="0">
+                <a:latin typeface="Times New Roman" panose="02020603050405020304" pitchFamily="18" charset="0"/>
+                <a:cs typeface="Times New Roman" panose="02020603050405020304" pitchFamily="18" charset="0"/>
+              </a:rPr>
+              <a:t>-based Framework. Information Systems Frontiers, 25, 1985–2003.</a:t>
+            </a:r>
+          </a:p>
+          <a:p>
+            <a:pPr algn="just"/>
+            <a:endParaRPr lang="en-IN" dirty="0">
+              <a:latin typeface="Times New Roman" panose="02020603050405020304" pitchFamily="18" charset="0"/>
+              <a:cs typeface="Times New Roman" panose="02020603050405020304" pitchFamily="18" charset="0"/>
+            </a:endParaRPr>
+          </a:p>
+          <a:p>
+            <a:pPr algn="just"/>
+            <a:r>
+              <a:rPr lang="en-IN" dirty="0">
+                <a:latin typeface="Times New Roman" panose="02020603050405020304" pitchFamily="18" charset="0"/>
+                <a:cs typeface="Times New Roman" panose="02020603050405020304" pitchFamily="18" charset="0"/>
+              </a:rPr>
+              <a:t>[2].Nagarajan, P., &amp; Kamali, B. (2024). Fraud Detection in Online Transactions using Hybrid CNN and XGBOOST. Proceedings of the 2024 International Conference on Emerging Research in Computational Science.</a:t>
+            </a:r>
+          </a:p>
+          <a:p>
+            <a:pPr algn="just"/>
+            <a:endParaRPr lang="en-IN" dirty="0">
+              <a:latin typeface="Times New Roman" panose="02020603050405020304" pitchFamily="18" charset="0"/>
+              <a:cs typeface="Times New Roman" panose="02020603050405020304" pitchFamily="18" charset="0"/>
+            </a:endParaRPr>
+          </a:p>
+          <a:p>
+            <a:pPr algn="just"/>
+            <a:r>
+              <a:rPr lang="en-IN" dirty="0">
+                <a:latin typeface="Times New Roman" panose="02020603050405020304" pitchFamily="18" charset="0"/>
+                <a:cs typeface="Times New Roman" panose="02020603050405020304" pitchFamily="18" charset="0"/>
+              </a:rPr>
+              <a:t>[3].Negi, A., &amp; Kumar, D. (2025). Fraud Detection in Financial Transactions Using Machine Learning Techniques. Proceedings of the 2025 International Conference on Networks and Cryptology.</a:t>
+            </a:r>
+          </a:p>
+          <a:p>
+            <a:pPr algn="just"/>
+            <a:endParaRPr lang="en-IN" dirty="0">
+              <a:latin typeface="Times New Roman" panose="02020603050405020304" pitchFamily="18" charset="0"/>
+              <a:cs typeface="Times New Roman" panose="02020603050405020304" pitchFamily="18" charset="0"/>
+            </a:endParaRPr>
+          </a:p>
+          <a:p>
+            <a:pPr algn="just"/>
+            <a:r>
+              <a:rPr lang="en-IN" dirty="0">
+                <a:latin typeface="Times New Roman" panose="02020603050405020304" pitchFamily="18" charset="0"/>
+                <a:cs typeface="Times New Roman" panose="02020603050405020304" pitchFamily="18" charset="0"/>
+              </a:rPr>
+              <a:t>[4]Chen, H., &amp; Chen, L. (2022). An application of the </a:t>
+            </a:r>
+            <a:r>
+              <a:rPr lang="en-IN" dirty="0" err="1">
+                <a:latin typeface="Times New Roman" panose="02020603050405020304" pitchFamily="18" charset="0"/>
+                <a:cs typeface="Times New Roman" panose="02020603050405020304" pitchFamily="18" charset="0"/>
+              </a:rPr>
+              <a:t>XGBoost</a:t>
+            </a:r>
+            <a:r>
+              <a:rPr lang="en-IN" dirty="0">
+                <a:latin typeface="Times New Roman" panose="02020603050405020304" pitchFamily="18" charset="0"/>
+                <a:cs typeface="Times New Roman" panose="02020603050405020304" pitchFamily="18" charset="0"/>
+              </a:rPr>
+              <a:t> algorithm for online transaction fraud detection based on an improved sailfish optimiser. Proceedings of the 4th International Conference on Machine Learning, Big Data and Business Intelligence.</a:t>
+            </a:r>
+          </a:p>
+          <a:p>
+            <a:pPr marL="0" marR="0" lvl="0" indent="0" algn="just" defTabSz="914400" rtl="0" eaLnBrk="0" fontAlgn="base" latinLnBrk="0" hangingPunct="0">
+              <a:spcBef>
+                <a:spcPct val="0"/>
+              </a:spcBef>
+              <a:spcAft>
+                <a:spcPct val="0"/>
+              </a:spcAft>
+              <a:buClrTx/>
+              <a:buSzTx/>
+              <a:tabLst/>
+            </a:pPr>
+            <a:endParaRPr kumimoji="0" lang="en-US" altLang="en-US" sz="1800" b="0" i="0" u="none" strike="noStrike" cap="none" normalizeH="0" baseline="0" dirty="0">
+              <a:ln>
+                <a:noFill/>
+              </a:ln>
+              <a:solidFill>
+                <a:schemeClr val="tx1"/>
+              </a:solidFill>
+              <a:effectLst/>
+              <a:latin typeface="Times New Roman" panose="02020603050405020304" pitchFamily="18" charset="0"/>
+              <a:cs typeface="Times New Roman" panose="02020603050405020304" pitchFamily="18" charset="0"/>
+            </a:endParaRPr>
+          </a:p>
+        </p:txBody>
+      </p:sp>
+    </p:spTree>
+    <p:extLst>
+      <p:ext uri="{BB962C8B-B14F-4D97-AF65-F5344CB8AC3E}">
+        <p14:creationId xmlns:p14="http://schemas.microsoft.com/office/powerpoint/2010/main" val="2126352998"/>
+      </p:ext>
+    </p:extLst>
+  </p:cSld>
+  <p:clrMapOvr>
+    <a:masterClrMapping/>
+  </p:clrMapOvr>
+  <mc:AlternateContent xmlns:mc="http://schemas.openxmlformats.org/markup-compatibility/2006" xmlns:p14="http://schemas.microsoft.com/office/powerpoint/2010/main">
+    <mc:Choice Requires="p14">
+      <p:transition p14:dur="100">
+        <p:cut/>
+      </p:transition>
+    </mc:Choice>
+    <mc:Fallback xmlns="">
+      <p:transition>
+        <p:cut/>
+      </p:transition>
+    </mc:Fallback>
+  </mc:AlternateContent>
+</p:sld>
+</file>
+
+<file path=ppt/slides/slide41.xml><?xml version="1.0" encoding="utf-8"?>
+<p:sld xmlns:a="http://schemas.openxmlformats.org/drawingml/2006/main" xmlns:r="http://schemas.openxmlformats.org/officeDocument/2006/relationships" xmlns:p="http://schemas.openxmlformats.org/presentationml/2006/main">
+  <p:cSld>
+    <p:spTree>
+      <p:nvGrpSpPr>
+        <p:cNvPr id="1" name=""/>
+        <p:cNvGrpSpPr/>
+        <p:nvPr/>
+      </p:nvGrpSpPr>
+      <p:grpSpPr>
+        <a:xfrm>
+          <a:off x="0" y="0"/>
+          <a:ext cx="0" cy="0"/>
+          <a:chOff x="0" y="0"/>
+          <a:chExt cx="0" cy="0"/>
+        </a:xfrm>
+      </p:grpSpPr>
+      <p:sp>
+        <p:nvSpPr>
+          <p:cNvPr id="2" name="TextBox 1"/>
+          <p:cNvSpPr txBox="1"/>
+          <p:nvPr/>
+        </p:nvSpPr>
+        <p:spPr>
+          <a:xfrm>
+            <a:off x="1825539" y="1982450"/>
+            <a:ext cx="7148684" cy="1446550"/>
+          </a:xfrm>
+          <a:prstGeom prst="rect">
+            <a:avLst/>
+          </a:prstGeom>
+        </p:spPr>
+        <p:txBody>
+          <a:bodyPr rot="0" spcFirstLastPara="0" vertOverflow="overflow" horzOverflow="overflow" vert="horz" wrap="square" lIns="91440" tIns="45720" rIns="91440" bIns="45720" numCol="1" spcCol="0" rtlCol="0" fromWordArt="0" anchor="t" anchorCtr="0" forceAA="0" compatLnSpc="1">
+            <a:prstTxWarp prst="textNoShape">
+              <a:avLst/>
+            </a:prstTxWarp>
+            <a:spAutoFit/>
+          </a:bodyPr>
+          <a:lstStyle/>
+          <a:p>
+            <a:pPr algn="ctr"/>
+            <a:r>
+              <a:rPr lang="en-US" sz="4800" b="1" dirty="0">
+                <a:solidFill>
+                  <a:srgbClr val="D47D26"/>
+                </a:solidFill>
+                <a:latin typeface="Times New Roman" panose="02020603050405020304" pitchFamily="18" charset="0"/>
+                <a:cs typeface="Times New Roman" panose="02020603050405020304" pitchFamily="18" charset="0"/>
+              </a:rPr>
+              <a:t>THANK</a:t>
+            </a:r>
+            <a:r>
+              <a:rPr lang="en-US" sz="8800" dirty="0">
+                <a:latin typeface="Times New Roman" panose="02020603050405020304" pitchFamily="18" charset="0"/>
+                <a:cs typeface="Times New Roman" panose="02020603050405020304" pitchFamily="18" charset="0"/>
+              </a:rPr>
+              <a:t> </a:t>
+            </a:r>
+            <a:r>
+              <a:rPr lang="en-US" sz="4800" b="1" dirty="0">
+                <a:solidFill>
+                  <a:srgbClr val="D47D26"/>
+                </a:solidFill>
+                <a:latin typeface="Times New Roman" panose="02020603050405020304" pitchFamily="18" charset="0"/>
+                <a:cs typeface="Times New Roman" panose="02020603050405020304" pitchFamily="18" charset="0"/>
+              </a:rPr>
+              <a:t>YOU</a:t>
+            </a:r>
+            <a:endParaRPr lang="en-US" sz="4800" dirty="0">
+              <a:latin typeface="Times New Roman" panose="02020603050405020304" pitchFamily="18" charset="0"/>
+              <a:cs typeface="Times New Roman" panose="02020603050405020304" pitchFamily="18" charset="0"/>
+            </a:endParaRPr>
+          </a:p>
+        </p:txBody>
+      </p:sp>
+    </p:spTree>
+    <p:extLst>
+      <p:ext uri="{BB962C8B-B14F-4D97-AF65-F5344CB8AC3E}">
+        <p14:creationId xmlns:p14="http://schemas.microsoft.com/office/powerpoint/2010/main" val="3760984619"/>
+      </p:ext>
+    </p:extLst>
+  </p:cSld>
+  <p:clrMapOvr>
+    <a:masterClrMapping/>
+  </p:clrMapOvr>
+  <mc:AlternateContent xmlns:mc="http://schemas.openxmlformats.org/markup-compatibility/2006" xmlns:p14="http://schemas.microsoft.com/office/powerpoint/2010/main">
+    <mc:Choice Requires="p14">
+      <p:transition p14:dur="100">
+        <p:cut/>
+      </p:transition>
+    </mc:Choice>
+    <mc:Fallback xmlns="">
+      <p:transition>
+        <p:cut/>
+      </p:transition>
+    </mc:Fallback>
+  </mc:AlternateContent>
+</p:sld>
+</file>
+
+<file path=ppt/slides/slide42.xml><?xml version="1.0" encoding="utf-8"?>
+<p:sld xmlns:a="http://schemas.openxmlformats.org/drawingml/2006/main" xmlns:r="http://schemas.openxmlformats.org/officeDocument/2006/relationships" xmlns:p="http://schemas.openxmlformats.org/presentationml/2006/main">
+  <p:cSld>
+    <p:spTree>
+      <p:nvGrpSpPr>
+        <p:cNvPr id="1" name=""/>
+        <p:cNvGrpSpPr/>
+        <p:nvPr/>
+      </p:nvGrpSpPr>
+      <p:grpSpPr>
+        <a:xfrm>
+          <a:off x="0" y="0"/>
+          <a:ext cx="0" cy="0"/>
+          <a:chOff x="0" y="0"/>
+          <a:chExt cx="0" cy="0"/>
+        </a:xfrm>
+      </p:grpSpPr>
+      <p:pic>
+        <p:nvPicPr>
+          <p:cNvPr id="3" name="Picture 2">
+            <a:extLst>
+              <a:ext uri="{FF2B5EF4-FFF2-40B4-BE49-F238E27FC236}">
+                <a16:creationId xmlns:a16="http://schemas.microsoft.com/office/drawing/2014/main" id="{F9659E80-0AC6-5173-70C2-B0AB3568EC82}"/>
+              </a:ext>
+            </a:extLst>
+          </p:cNvPr>
+          <p:cNvPicPr>
+            <a:picLocks noChangeAspect="1"/>
+          </p:cNvPicPr>
+          <p:nvPr/>
+        </p:nvPicPr>
+        <p:blipFill>
+          <a:blip r:embed="rId2"/>
+          <a:stretch>
+            <a:fillRect/>
+          </a:stretch>
+        </p:blipFill>
+        <p:spPr>
+          <a:xfrm>
+            <a:off x="1583457" y="836712"/>
+            <a:ext cx="7329267" cy="5688632"/>
+          </a:xfrm>
+          <a:prstGeom prst="rect">
+            <a:avLst/>
+          </a:prstGeom>
+        </p:spPr>
+      </p:pic>
+    </p:spTree>
+    <p:extLst>
+      <p:ext uri="{BB962C8B-B14F-4D97-AF65-F5344CB8AC3E}">
+        <p14:creationId xmlns:p14="http://schemas.microsoft.com/office/powerpoint/2010/main" val="2403605681"/>
+      </p:ext>
+    </p:extLst>
+  </p:cSld>
+  <p:clrMapOvr>
+    <a:masterClrMapping/>
+  </p:clrMapOvr>
+  <mc:AlternateContent xmlns:mc="http://schemas.openxmlformats.org/markup-compatibility/2006" xmlns:p14="http://schemas.microsoft.com/office/powerpoint/2010/main">
+    <mc:Choice Requires="p14">
+      <p:transition p14:dur="100">
+        <p:cut/>
+      </p:transition>
+    </mc:Choice>
+    <mc:Fallback xmlns="">
+      <p:transition>
+        <p:cut/>
+      </p:transition>
+    </mc:Fallback>
+  </mc:AlternateContent>
+</p:sld>
+</file>
+
 <file path=ppt/slides/slide5.xml><?xml version="1.0" encoding="utf-8"?>
 <p:sld xmlns:a="http://schemas.openxmlformats.org/drawingml/2006/main" xmlns:r="http://schemas.openxmlformats.org/officeDocument/2006/relationships" xmlns:p="http://schemas.openxmlformats.org/presentationml/2006/main">
   <p:cSld>
@@ -20822,6 +22163,10 @@
             <a:endParaRPr lang="en-US" dirty="0"/>
           </a:p>
           <a:p>
+            <a:pPr marL="285750" indent="-285750">
+              <a:buFont typeface="Arial" panose="020B0604020202020204" pitchFamily="34" charset="0"/>
+              <a:buChar char="•"/>
+            </a:pPr>
             <a:r>
               <a:rPr lang="en-US" dirty="0"/>
               <a:t>Rows : </a:t>
@@ -20832,6 +22177,10 @@
             </a:r>
           </a:p>
           <a:p>
+            <a:pPr marL="285750" indent="-285750">
+              <a:buFont typeface="Arial" panose="020B0604020202020204" pitchFamily="34" charset="0"/>
+              <a:buChar char="•"/>
+            </a:pPr>
             <a:r>
               <a:rPr lang="en-US" dirty="0"/>
               <a:t>Columns : </a:t>
@@ -20854,6 +22203,10 @@
             <a:endParaRPr lang="en-US" dirty="0"/>
           </a:p>
           <a:p>
+            <a:pPr marL="285750" indent="-285750">
+              <a:buFont typeface="Arial" panose="020B0604020202020204" pitchFamily="34" charset="0"/>
+              <a:buChar char="•"/>
+            </a:pPr>
             <a:r>
               <a:rPr lang="en-US" b="1" dirty="0"/>
               <a:t>User Info</a:t>
@@ -20872,9 +22225,17 @@
             </a:r>
           </a:p>
           <a:p>
+            <a:pPr marL="285750" indent="-285750">
+              <a:buFont typeface="Arial" panose="020B0604020202020204" pitchFamily="34" charset="0"/>
+              <a:buChar char="•"/>
+            </a:pPr>
             <a:endParaRPr lang="en-US" dirty="0"/>
           </a:p>
           <a:p>
+            <a:pPr marL="285750" indent="-285750">
+              <a:buFont typeface="Arial" panose="020B0604020202020204" pitchFamily="34" charset="0"/>
+              <a:buChar char="•"/>
+            </a:pPr>
             <a:r>
               <a:rPr lang="en-US" b="1" dirty="0"/>
               <a:t>Session Info</a:t>
@@ -20893,9 +22254,17 @@
             </a:r>
           </a:p>
           <a:p>
+            <a:pPr marL="285750" indent="-285750">
+              <a:buFont typeface="Arial" panose="020B0604020202020204" pitchFamily="34" charset="0"/>
+              <a:buChar char="•"/>
+            </a:pPr>
             <a:endParaRPr lang="en-US" dirty="0"/>
           </a:p>
           <a:p>
+            <a:pPr marL="285750" indent="-285750">
+              <a:buFont typeface="Arial" panose="020B0604020202020204" pitchFamily="34" charset="0"/>
+              <a:buChar char="•"/>
+            </a:pPr>
             <a:r>
               <a:rPr lang="en-US" b="1" dirty="0"/>
               <a:t>Time Info</a:t>
@@ -20919,9 +22288,17 @@
             <a:endParaRPr lang="en-US" dirty="0"/>
           </a:p>
           <a:p>
+            <a:pPr marL="285750" indent="-285750">
+              <a:buFont typeface="Arial" panose="020B0604020202020204" pitchFamily="34" charset="0"/>
+              <a:buChar char="•"/>
+            </a:pPr>
             <a:endParaRPr lang="en-US" dirty="0"/>
           </a:p>
           <a:p>
+            <a:pPr marL="285750" indent="-285750">
+              <a:buFont typeface="Arial" panose="020B0604020202020204" pitchFamily="34" charset="0"/>
+              <a:buChar char="•"/>
+            </a:pPr>
             <a:r>
               <a:rPr lang="en-US" b="1" dirty="0"/>
               <a:t>Transaction Info</a:t>
@@ -20940,9 +22317,17 @@
             </a:r>
           </a:p>
           <a:p>
+            <a:pPr marL="285750" indent="-285750">
+              <a:buFont typeface="Arial" panose="020B0604020202020204" pitchFamily="34" charset="0"/>
+              <a:buChar char="•"/>
+            </a:pPr>
             <a:endParaRPr lang="en-US" dirty="0"/>
           </a:p>
           <a:p>
+            <a:pPr marL="285750" indent="-285750">
+              <a:buFont typeface="Arial" panose="020B0604020202020204" pitchFamily="34" charset="0"/>
+              <a:buChar char="•"/>
+            </a:pPr>
             <a:r>
               <a:rPr lang="en-US" b="1" dirty="0"/>
               <a:t>Linking Key</a:t>
@@ -20958,9 +22343,17 @@
             <a:endParaRPr lang="en-US" dirty="0"/>
           </a:p>
           <a:p>
+            <a:pPr marL="285750" indent="-285750">
+              <a:buFont typeface="Arial" panose="020B0604020202020204" pitchFamily="34" charset="0"/>
+              <a:buChar char="•"/>
+            </a:pPr>
             <a:endParaRPr lang="en-US" dirty="0"/>
           </a:p>
           <a:p>
+            <a:pPr marL="285750" indent="-285750">
+              <a:buFont typeface="Arial" panose="020B0604020202020204" pitchFamily="34" charset="0"/>
+              <a:buChar char="•"/>
+            </a:pPr>
             <a:r>
               <a:rPr lang="en-US" b="1" dirty="0"/>
               <a:t>Target Variable</a:t>
@@ -21062,6 +22455,10 @@
             <a:endParaRPr lang="en-US" dirty="0"/>
           </a:p>
           <a:p>
+            <a:pPr marL="285750" indent="-285750">
+              <a:buFont typeface="Arial" panose="020B0604020202020204" pitchFamily="34" charset="0"/>
+              <a:buChar char="•"/>
+            </a:pPr>
             <a:r>
               <a:rPr lang="en-US" dirty="0"/>
               <a:t>Rows : </a:t>
@@ -21072,6 +22469,10 @@
             </a:r>
           </a:p>
           <a:p>
+            <a:pPr marL="285750" indent="-285750">
+              <a:buFont typeface="Arial" panose="020B0604020202020204" pitchFamily="34" charset="0"/>
+              <a:buChar char="•"/>
+            </a:pPr>
             <a:r>
               <a:rPr lang="en-US" dirty="0"/>
               <a:t>Columns : </a:t>
@@ -21091,9 +22492,17 @@
             </a:r>
           </a:p>
           <a:p>
+            <a:pPr marL="285750" indent="-285750">
+              <a:buFont typeface="Arial" panose="020B0604020202020204" pitchFamily="34" charset="0"/>
+              <a:buChar char="•"/>
+            </a:pPr>
             <a:endParaRPr lang="en-US" dirty="0"/>
           </a:p>
           <a:p>
+            <a:pPr marL="285750" indent="-285750">
+              <a:buFont typeface="Arial" panose="020B0604020202020204" pitchFamily="34" charset="0"/>
+              <a:buChar char="•"/>
+            </a:pPr>
             <a:r>
               <a:rPr lang="en-US" b="1" dirty="0" err="1"/>
               <a:t>lower_bound_ip_address</a:t>
@@ -21108,9 +22517,17 @@
             </a:r>
           </a:p>
           <a:p>
+            <a:pPr marL="285750" indent="-285750">
+              <a:buFont typeface="Arial" panose="020B0604020202020204" pitchFamily="34" charset="0"/>
+              <a:buChar char="•"/>
+            </a:pPr>
             <a:endParaRPr lang="en-US" dirty="0"/>
           </a:p>
           <a:p>
+            <a:pPr marL="285750" indent="-285750">
+              <a:buFont typeface="Arial" panose="020B0604020202020204" pitchFamily="34" charset="0"/>
+              <a:buChar char="•"/>
+            </a:pPr>
             <a:r>
               <a:rPr lang="en-US" b="1" dirty="0" err="1"/>
               <a:t>upper_bound_ip_address</a:t>
@@ -21125,9 +22542,17 @@
             </a:r>
           </a:p>
           <a:p>
+            <a:pPr marL="285750" indent="-285750">
+              <a:buFont typeface="Arial" panose="020B0604020202020204" pitchFamily="34" charset="0"/>
+              <a:buChar char="•"/>
+            </a:pPr>
             <a:endParaRPr lang="en-US" dirty="0"/>
           </a:p>
           <a:p>
+            <a:pPr marL="285750" indent="-285750">
+              <a:buFont typeface="Arial" panose="020B0604020202020204" pitchFamily="34" charset="0"/>
+              <a:buChar char="•"/>
+            </a:pPr>
             <a:r>
               <a:rPr lang="en-US" b="1" dirty="0"/>
               <a:t>country: </a:t>
